--- a/遥控器显示/素材/v3/v3.pptx
+++ b/遥控器显示/素材/v3/v3.pptx
@@ -7,8 +7,10 @@
   <p:sldIdLst>
     <p:sldId id="257" r:id="rId3"/>
     <p:sldId id="266" r:id="rId4"/>
-    <p:sldId id="264" r:id="rId5"/>
-    <p:sldId id="265" r:id="rId6"/>
+    <p:sldId id="268" r:id="rId5"/>
+    <p:sldId id="264" r:id="rId6"/>
+    <p:sldId id="265" r:id="rId7"/>
+    <p:sldId id="267" r:id="rId8"/>
   </p:sldIdLst>
   <p:sldSz cx="12192000" cy="6858000"/>
   <p:notesSz cx="6858000" cy="9144000"/>
@@ -110,7 +112,7 @@
   <p:extLst>
     <p:ext uri="{EFAFB233-063F-42B5-8137-9DF3F51BA10A}">
       <p15:sldGuideLst xmlns:p15="http://schemas.microsoft.com/office/powerpoint/2012/main">
-        <p15:guide id="1" orient="horz" pos="2150" userDrawn="1">
+        <p15:guide id="1" orient="horz" pos="2151" userDrawn="1">
           <p15:clr>
             <a:srgbClr val="A4A3A4"/>
           </p15:clr>
@@ -3090,7 +3092,7 @@
         </p:nvSpPr>
         <p:spPr>
           <a:xfrm>
-            <a:off x="3398520" y="5373370"/>
+            <a:off x="1886585" y="5373370"/>
             <a:ext cx="2356485" cy="921385"/>
           </a:xfrm>
           <a:prstGeom prst="roundRect">
@@ -3132,7 +3134,49 @@
         </p:nvSpPr>
         <p:spPr>
           <a:xfrm>
-            <a:off x="6429375" y="5373370"/>
+            <a:off x="4917440" y="5373370"/>
+            <a:ext cx="2356485" cy="921385"/>
+          </a:xfrm>
+          <a:prstGeom prst="roundRect">
+            <a:avLst/>
+          </a:prstGeom>
+          <a:solidFill>
+            <a:schemeClr val="bg2"/>
+          </a:solidFill>
+        </p:spPr>
+        <p:style>
+          <a:lnRef idx="2">
+            <a:schemeClr val="accent1">
+              <a:lumMod val="75000"/>
+            </a:schemeClr>
+          </a:lnRef>
+          <a:fillRef idx="1">
+            <a:schemeClr val="accent1"/>
+          </a:fillRef>
+          <a:effectRef idx="0">
+            <a:srgbClr val="FFFFFF"/>
+          </a:effectRef>
+          <a:fontRef idx="minor">
+            <a:schemeClr val="lt1"/>
+          </a:fontRef>
+        </p:style>
+        <p:txBody>
+          <a:bodyPr rtlCol="0" anchor="ctr"/>
+          <a:p>
+            <a:pPr algn="ctr"/>
+            <a:endParaRPr lang="zh-CN" altLang="en-US"/>
+          </a:p>
+        </p:txBody>
+      </p:sp>
+      <p:sp>
+        <p:nvSpPr>
+          <p:cNvPr id="2" name="圆角矩形 1"/>
+          <p:cNvSpPr/>
+          <p:nvPr/>
+        </p:nvSpPr>
+        <p:spPr>
+          <a:xfrm>
+            <a:off x="7948295" y="5373370"/>
             <a:ext cx="2356485" cy="921385"/>
           </a:xfrm>
           <a:prstGeom prst="roundRect">
@@ -3196,90 +3240,6 @@
       </p:grpSpPr>
       <p:sp>
         <p:nvSpPr>
-          <p:cNvPr id="4" name="圆角矩形 3"/>
-          <p:cNvSpPr/>
-          <p:nvPr/>
-        </p:nvSpPr>
-        <p:spPr>
-          <a:xfrm>
-            <a:off x="3398520" y="5373370"/>
-            <a:ext cx="2356485" cy="921385"/>
-          </a:xfrm>
-          <a:prstGeom prst="roundRect">
-            <a:avLst/>
-          </a:prstGeom>
-          <a:solidFill>
-            <a:schemeClr val="accent2"/>
-          </a:solidFill>
-        </p:spPr>
-        <p:style>
-          <a:lnRef idx="2">
-            <a:schemeClr val="accent1">
-              <a:lumMod val="75000"/>
-            </a:schemeClr>
-          </a:lnRef>
-          <a:fillRef idx="1">
-            <a:schemeClr val="accent1"/>
-          </a:fillRef>
-          <a:effectRef idx="0">
-            <a:srgbClr val="FFFFFF"/>
-          </a:effectRef>
-          <a:fontRef idx="minor">
-            <a:schemeClr val="lt1"/>
-          </a:fontRef>
-        </p:style>
-        <p:txBody>
-          <a:bodyPr rtlCol="0" anchor="ctr"/>
-          <a:p>
-            <a:pPr algn="ctr"/>
-            <a:endParaRPr lang="zh-CN" altLang="en-US"/>
-          </a:p>
-        </p:txBody>
-      </p:sp>
-      <p:sp>
-        <p:nvSpPr>
-          <p:cNvPr id="5" name="圆角矩形 4"/>
-          <p:cNvSpPr/>
-          <p:nvPr/>
-        </p:nvSpPr>
-        <p:spPr>
-          <a:xfrm>
-            <a:off x="6429375" y="5373370"/>
-            <a:ext cx="2356485" cy="921385"/>
-          </a:xfrm>
-          <a:prstGeom prst="roundRect">
-            <a:avLst/>
-          </a:prstGeom>
-          <a:solidFill>
-            <a:schemeClr val="bg2"/>
-          </a:solidFill>
-        </p:spPr>
-        <p:style>
-          <a:lnRef idx="2">
-            <a:schemeClr val="accent1">
-              <a:lumMod val="75000"/>
-            </a:schemeClr>
-          </a:lnRef>
-          <a:fillRef idx="1">
-            <a:schemeClr val="accent1"/>
-          </a:fillRef>
-          <a:effectRef idx="0">
-            <a:srgbClr val="FFFFFF"/>
-          </a:effectRef>
-          <a:fontRef idx="minor">
-            <a:schemeClr val="lt1"/>
-          </a:fontRef>
-        </p:style>
-        <p:txBody>
-          <a:bodyPr rtlCol="0" anchor="ctr"/>
-          <a:p>
-            <a:pPr algn="ctr"/>
-            <a:endParaRPr lang="zh-CN" altLang="en-US"/>
-          </a:p>
-        </p:txBody>
-      </p:sp>
-      <p:sp>
-        <p:nvSpPr>
           <p:cNvPr id="2" name="矩形 1"/>
           <p:cNvSpPr/>
           <p:nvPr/>
@@ -4008,7 +3968,6 @@
             <a:pPr algn="ctr"/>
             <a:r>
               <a:rPr lang="en-US" altLang="zh-CN" sz="2000" b="1">
-                <a:ln/>
                 <a:solidFill>
                   <a:schemeClr val="bg1"/>
                 </a:solidFill>
@@ -4023,7 +3982,6 @@
               <a:t>10</a:t>
             </a:r>
             <a:endParaRPr lang="en-US" altLang="zh-CN" sz="2000" b="1">
-              <a:ln/>
               <a:solidFill>
                 <a:schemeClr val="bg1"/>
               </a:solidFill>
@@ -4643,6 +4601,140 @@
           </a:p>
         </p:txBody>
       </p:sp>
+      <p:sp>
+        <p:nvSpPr>
+          <p:cNvPr id="32" name="圆角矩形 31"/>
+          <p:cNvSpPr/>
+          <p:nvPr/>
+        </p:nvSpPr>
+        <p:spPr>
+          <a:xfrm>
+            <a:off x="1886585" y="5373370"/>
+            <a:ext cx="2356485" cy="921385"/>
+          </a:xfrm>
+          <a:prstGeom prst="roundRect">
+            <a:avLst/>
+          </a:prstGeom>
+          <a:solidFill>
+            <a:schemeClr val="accent2"/>
+          </a:solidFill>
+        </p:spPr>
+        <p:style>
+          <a:lnRef idx="2">
+            <a:schemeClr val="accent1">
+              <a:lumMod val="75000"/>
+            </a:schemeClr>
+          </a:lnRef>
+          <a:fillRef idx="1">
+            <a:schemeClr val="accent1"/>
+          </a:fillRef>
+          <a:effectRef idx="0">
+            <a:srgbClr val="FFFFFF"/>
+          </a:effectRef>
+          <a:fontRef idx="minor">
+            <a:schemeClr val="lt1"/>
+          </a:fontRef>
+        </p:style>
+        <p:txBody>
+          <a:bodyPr vertOverflow="overflow" horzOverflow="overflow" vert="horz" wrap="square" numCol="1" spcCol="0" rtlCol="0" fromWordArt="0" anchor="ctr" anchorCtr="0" forceAA="0" compatLnSpc="1">
+            <a:noAutofit/>
+          </a:bodyPr>
+          <a:p>
+            <a:pPr lvl="0" algn="ctr">
+              <a:buClrTx/>
+              <a:buSzTx/>
+              <a:buFontTx/>
+            </a:pPr>
+            <a:endParaRPr lang="zh-CN" altLang="en-US">
+              <a:sym typeface="+mn-ea"/>
+            </a:endParaRPr>
+          </a:p>
+        </p:txBody>
+      </p:sp>
+      <p:sp>
+        <p:nvSpPr>
+          <p:cNvPr id="33" name="圆角矩形 32"/>
+          <p:cNvSpPr/>
+          <p:nvPr/>
+        </p:nvSpPr>
+        <p:spPr>
+          <a:xfrm>
+            <a:off x="4917440" y="5373370"/>
+            <a:ext cx="2356485" cy="921385"/>
+          </a:xfrm>
+          <a:prstGeom prst="roundRect">
+            <a:avLst/>
+          </a:prstGeom>
+          <a:solidFill>
+            <a:schemeClr val="bg2"/>
+          </a:solidFill>
+        </p:spPr>
+        <p:style>
+          <a:lnRef idx="2">
+            <a:schemeClr val="accent1">
+              <a:lumMod val="75000"/>
+            </a:schemeClr>
+          </a:lnRef>
+          <a:fillRef idx="1">
+            <a:schemeClr val="accent1"/>
+          </a:fillRef>
+          <a:effectRef idx="0">
+            <a:srgbClr val="FFFFFF"/>
+          </a:effectRef>
+          <a:fontRef idx="minor">
+            <a:schemeClr val="lt1"/>
+          </a:fontRef>
+        </p:style>
+        <p:txBody>
+          <a:bodyPr rtlCol="0" anchor="ctr"/>
+          <a:p>
+            <a:pPr algn="ctr"/>
+            <a:endParaRPr lang="zh-CN" altLang="en-US"/>
+          </a:p>
+        </p:txBody>
+      </p:sp>
+      <p:sp>
+        <p:nvSpPr>
+          <p:cNvPr id="34" name="圆角矩形 33"/>
+          <p:cNvSpPr/>
+          <p:nvPr/>
+        </p:nvSpPr>
+        <p:spPr>
+          <a:xfrm>
+            <a:off x="7948295" y="5373370"/>
+            <a:ext cx="2356485" cy="921385"/>
+          </a:xfrm>
+          <a:prstGeom prst="roundRect">
+            <a:avLst/>
+          </a:prstGeom>
+          <a:solidFill>
+            <a:schemeClr val="bg2"/>
+          </a:solidFill>
+        </p:spPr>
+        <p:style>
+          <a:lnRef idx="2">
+            <a:schemeClr val="accent1">
+              <a:lumMod val="75000"/>
+            </a:schemeClr>
+          </a:lnRef>
+          <a:fillRef idx="1">
+            <a:schemeClr val="accent1"/>
+          </a:fillRef>
+          <a:effectRef idx="0">
+            <a:srgbClr val="FFFFFF"/>
+          </a:effectRef>
+          <a:fontRef idx="minor">
+            <a:schemeClr val="lt1"/>
+          </a:fontRef>
+        </p:style>
+        <p:txBody>
+          <a:bodyPr rtlCol="0" anchor="ctr"/>
+          <a:p>
+            <a:pPr algn="ctr"/>
+            <a:endParaRPr lang="zh-CN" altLang="en-US"/>
+          </a:p>
+        </p:txBody>
+      </p:sp>
     </p:spTree>
     <p:custDataLst>
       <p:tags r:id="rId1"/>
@@ -4673,21 +4765,27 @@
       </p:grpSpPr>
       <p:sp>
         <p:nvSpPr>
-          <p:cNvPr id="4" name="圆角矩形 3"/>
+          <p:cNvPr id="2" name="矩形 1"/>
           <p:cNvSpPr/>
           <p:nvPr/>
         </p:nvSpPr>
         <p:spPr>
           <a:xfrm>
-            <a:off x="3398520" y="5373370"/>
-            <a:ext cx="2356485" cy="921385"/>
-          </a:xfrm>
-          <a:prstGeom prst="roundRect">
+            <a:off x="2499995" y="691200"/>
+            <a:ext cx="2132330" cy="1038860"/>
+          </a:xfrm>
+          <a:prstGeom prst="rect">
             <a:avLst/>
           </a:prstGeom>
           <a:solidFill>
-            <a:schemeClr val="accent2"/>
+            <a:srgbClr val="295210"/>
           </a:solidFill>
+          <a:ln w="12700" cmpd="sng">
+            <a:solidFill>
+              <a:srgbClr val="04120C"/>
+            </a:solidFill>
+            <a:prstDash val="solid"/>
+          </a:ln>
         </p:spPr>
         <p:style>
           <a:lnRef idx="2">
@@ -4715,21 +4813,27 @@
       </p:sp>
       <p:sp>
         <p:nvSpPr>
-          <p:cNvPr id="5" name="圆角矩形 4"/>
+          <p:cNvPr id="3" name="矩形 2"/>
           <p:cNvSpPr/>
           <p:nvPr/>
         </p:nvSpPr>
         <p:spPr>
           <a:xfrm>
-            <a:off x="6429375" y="5373370"/>
-            <a:ext cx="2356485" cy="921385"/>
-          </a:xfrm>
-          <a:prstGeom prst="roundRect">
+            <a:off x="4629600" y="691515"/>
+            <a:ext cx="2132330" cy="1038860"/>
+          </a:xfrm>
+          <a:prstGeom prst="rect">
             <a:avLst/>
           </a:prstGeom>
           <a:solidFill>
-            <a:schemeClr val="bg2"/>
+            <a:srgbClr val="2A7139"/>
           </a:solidFill>
+          <a:ln w="12700" cmpd="sng">
+            <a:solidFill>
+              <a:srgbClr val="04120C"/>
+            </a:solidFill>
+            <a:prstDash val="solid"/>
+          </a:ln>
         </p:spPr>
         <p:style>
           <a:lnRef idx="2">
@@ -4755,6 +4859,1435 @@
           </a:p>
         </p:txBody>
       </p:sp>
+      <p:sp>
+        <p:nvSpPr>
+          <p:cNvPr id="6" name="矩形 5"/>
+          <p:cNvSpPr/>
+          <p:nvPr/>
+        </p:nvSpPr>
+        <p:spPr>
+          <a:xfrm>
+            <a:off x="6760801" y="692785"/>
+            <a:ext cx="2132330" cy="1038860"/>
+          </a:xfrm>
+          <a:prstGeom prst="rect">
+            <a:avLst/>
+          </a:prstGeom>
+          <a:solidFill>
+            <a:srgbClr val="295210"/>
+          </a:solidFill>
+          <a:ln w="12700" cmpd="sng">
+            <a:solidFill>
+              <a:srgbClr val="04120C"/>
+            </a:solidFill>
+            <a:prstDash val="solid"/>
+          </a:ln>
+        </p:spPr>
+        <p:style>
+          <a:lnRef idx="2">
+            <a:schemeClr val="accent1">
+              <a:lumMod val="75000"/>
+            </a:schemeClr>
+          </a:lnRef>
+          <a:fillRef idx="1">
+            <a:schemeClr val="accent1"/>
+          </a:fillRef>
+          <a:effectRef idx="0">
+            <a:srgbClr val="FFFFFF"/>
+          </a:effectRef>
+          <a:fontRef idx="minor">
+            <a:schemeClr val="lt1"/>
+          </a:fontRef>
+        </p:style>
+        <p:txBody>
+          <a:bodyPr vertOverflow="overflow" horzOverflow="overflow" vert="horz" wrap="square" numCol="1" spcCol="0" rtlCol="0" fromWordArt="0" anchor="ctr" anchorCtr="0" forceAA="0" compatLnSpc="1">
+            <a:noAutofit/>
+          </a:bodyPr>
+          <a:p>
+            <a:pPr lvl="0" algn="ctr">
+              <a:buClrTx/>
+              <a:buSzTx/>
+              <a:buFontTx/>
+            </a:pPr>
+            <a:endParaRPr lang="zh-CN" altLang="en-US">
+              <a:sym typeface="+mn-ea"/>
+            </a:endParaRPr>
+          </a:p>
+        </p:txBody>
+      </p:sp>
+      <p:sp>
+        <p:nvSpPr>
+          <p:cNvPr id="7" name="矩形 6"/>
+          <p:cNvSpPr/>
+          <p:nvPr/>
+        </p:nvSpPr>
+        <p:spPr>
+          <a:xfrm>
+            <a:off x="2499995" y="1731600"/>
+            <a:ext cx="2132330" cy="1038860"/>
+          </a:xfrm>
+          <a:prstGeom prst="rect">
+            <a:avLst/>
+          </a:prstGeom>
+          <a:solidFill>
+            <a:srgbClr val="2A7139"/>
+          </a:solidFill>
+          <a:ln w="12700" cmpd="sng">
+            <a:solidFill>
+              <a:srgbClr val="04120C"/>
+            </a:solidFill>
+            <a:prstDash val="solid"/>
+          </a:ln>
+        </p:spPr>
+        <p:style>
+          <a:lnRef idx="2">
+            <a:schemeClr val="accent1">
+              <a:lumMod val="75000"/>
+            </a:schemeClr>
+          </a:lnRef>
+          <a:fillRef idx="1">
+            <a:schemeClr val="accent1"/>
+          </a:fillRef>
+          <a:effectRef idx="0">
+            <a:srgbClr val="FFFFFF"/>
+          </a:effectRef>
+          <a:fontRef idx="minor">
+            <a:schemeClr val="lt1"/>
+          </a:fontRef>
+        </p:style>
+        <p:txBody>
+          <a:bodyPr vertOverflow="overflow" horzOverflow="overflow" vert="horz" wrap="square" numCol="1" spcCol="0" rtlCol="0" fromWordArt="0" anchor="ctr" anchorCtr="0" forceAA="0" compatLnSpc="1">
+            <a:noAutofit/>
+          </a:bodyPr>
+          <a:p>
+            <a:pPr lvl="0" algn="ctr">
+              <a:buClrTx/>
+              <a:buSzTx/>
+              <a:buFontTx/>
+            </a:pPr>
+            <a:endParaRPr lang="zh-CN" altLang="en-US">
+              <a:sym typeface="+mn-ea"/>
+            </a:endParaRPr>
+          </a:p>
+        </p:txBody>
+      </p:sp>
+      <p:sp>
+        <p:nvSpPr>
+          <p:cNvPr id="8" name="矩形 7"/>
+          <p:cNvSpPr/>
+          <p:nvPr/>
+        </p:nvSpPr>
+        <p:spPr>
+          <a:xfrm>
+            <a:off x="4629600" y="1731600"/>
+            <a:ext cx="2132330" cy="1038860"/>
+          </a:xfrm>
+          <a:prstGeom prst="rect">
+            <a:avLst/>
+          </a:prstGeom>
+          <a:solidFill>
+            <a:srgbClr val="98A651"/>
+          </a:solidFill>
+          <a:ln w="12700" cmpd="sng">
+            <a:solidFill>
+              <a:srgbClr val="04120C"/>
+            </a:solidFill>
+            <a:prstDash val="solid"/>
+          </a:ln>
+        </p:spPr>
+        <p:style>
+          <a:lnRef idx="2">
+            <a:schemeClr val="accent1">
+              <a:lumMod val="75000"/>
+            </a:schemeClr>
+          </a:lnRef>
+          <a:fillRef idx="1">
+            <a:schemeClr val="accent1"/>
+          </a:fillRef>
+          <a:effectRef idx="0">
+            <a:srgbClr val="FFFFFF"/>
+          </a:effectRef>
+          <a:fontRef idx="minor">
+            <a:schemeClr val="lt1"/>
+          </a:fontRef>
+        </p:style>
+        <p:txBody>
+          <a:bodyPr rtlCol="0" anchor="ctr"/>
+          <a:p>
+            <a:pPr algn="ctr"/>
+            <a:endParaRPr lang="zh-CN" altLang="en-US"/>
+          </a:p>
+        </p:txBody>
+      </p:sp>
+      <p:sp>
+        <p:nvSpPr>
+          <p:cNvPr id="9" name="矩形 8"/>
+          <p:cNvSpPr/>
+          <p:nvPr/>
+        </p:nvSpPr>
+        <p:spPr>
+          <a:xfrm>
+            <a:off x="6760801" y="1731600"/>
+            <a:ext cx="2132330" cy="1038860"/>
+          </a:xfrm>
+          <a:prstGeom prst="rect">
+            <a:avLst/>
+          </a:prstGeom>
+          <a:solidFill>
+            <a:srgbClr val="2A7139"/>
+          </a:solidFill>
+          <a:ln w="12700" cmpd="sng">
+            <a:solidFill>
+              <a:srgbClr val="04120C"/>
+            </a:solidFill>
+            <a:prstDash val="solid"/>
+          </a:ln>
+        </p:spPr>
+        <p:style>
+          <a:lnRef idx="2">
+            <a:schemeClr val="accent1">
+              <a:lumMod val="75000"/>
+            </a:schemeClr>
+          </a:lnRef>
+          <a:fillRef idx="1">
+            <a:schemeClr val="accent1"/>
+          </a:fillRef>
+          <a:effectRef idx="0">
+            <a:srgbClr val="FFFFFF"/>
+          </a:effectRef>
+          <a:fontRef idx="minor">
+            <a:schemeClr val="lt1"/>
+          </a:fontRef>
+        </p:style>
+        <p:txBody>
+          <a:bodyPr vertOverflow="overflow" horzOverflow="overflow" vert="horz" wrap="square" numCol="1" spcCol="0" rtlCol="0" fromWordArt="0" anchor="ctr" anchorCtr="0" forceAA="0" compatLnSpc="1">
+            <a:noAutofit/>
+          </a:bodyPr>
+          <a:p>
+            <a:pPr lvl="0" algn="ctr">
+              <a:buClrTx/>
+              <a:buSzTx/>
+              <a:buFontTx/>
+            </a:pPr>
+            <a:endParaRPr lang="zh-CN" altLang="en-US">
+              <a:sym typeface="+mn-ea"/>
+            </a:endParaRPr>
+          </a:p>
+        </p:txBody>
+      </p:sp>
+      <p:sp>
+        <p:nvSpPr>
+          <p:cNvPr id="10" name="矩形 9"/>
+          <p:cNvSpPr/>
+          <p:nvPr/>
+        </p:nvSpPr>
+        <p:spPr>
+          <a:xfrm>
+            <a:off x="2499995" y="2772000"/>
+            <a:ext cx="2132330" cy="1038860"/>
+          </a:xfrm>
+          <a:prstGeom prst="rect">
+            <a:avLst/>
+          </a:prstGeom>
+          <a:solidFill>
+            <a:srgbClr val="295210"/>
+          </a:solidFill>
+          <a:ln w="12700" cmpd="sng">
+            <a:solidFill>
+              <a:srgbClr val="04120C"/>
+            </a:solidFill>
+            <a:prstDash val="solid"/>
+          </a:ln>
+        </p:spPr>
+        <p:style>
+          <a:lnRef idx="2">
+            <a:schemeClr val="accent1">
+              <a:lumMod val="75000"/>
+            </a:schemeClr>
+          </a:lnRef>
+          <a:fillRef idx="1">
+            <a:schemeClr val="accent1"/>
+          </a:fillRef>
+          <a:effectRef idx="0">
+            <a:srgbClr val="FFFFFF"/>
+          </a:effectRef>
+          <a:fontRef idx="minor">
+            <a:schemeClr val="lt1"/>
+          </a:fontRef>
+        </p:style>
+        <p:txBody>
+          <a:bodyPr vertOverflow="overflow" horzOverflow="overflow" vert="horz" wrap="square" numCol="1" spcCol="0" rtlCol="0" fromWordArt="0" anchor="ctr" anchorCtr="0" forceAA="0" compatLnSpc="1">
+            <a:noAutofit/>
+          </a:bodyPr>
+          <a:p>
+            <a:pPr lvl="0" algn="ctr">
+              <a:buClrTx/>
+              <a:buSzTx/>
+              <a:buFontTx/>
+            </a:pPr>
+            <a:endParaRPr lang="zh-CN" altLang="en-US">
+              <a:sym typeface="+mn-ea"/>
+            </a:endParaRPr>
+          </a:p>
+        </p:txBody>
+      </p:sp>
+      <p:sp>
+        <p:nvSpPr>
+          <p:cNvPr id="11" name="矩形 10"/>
+          <p:cNvSpPr/>
+          <p:nvPr/>
+        </p:nvSpPr>
+        <p:spPr>
+          <a:xfrm>
+            <a:off x="4629600" y="2772000"/>
+            <a:ext cx="2132330" cy="1038860"/>
+          </a:xfrm>
+          <a:prstGeom prst="rect">
+            <a:avLst/>
+          </a:prstGeom>
+          <a:solidFill>
+            <a:srgbClr val="2A7139"/>
+          </a:solidFill>
+          <a:ln w="12700" cmpd="sng">
+            <a:solidFill>
+              <a:srgbClr val="04120C"/>
+            </a:solidFill>
+            <a:prstDash val="solid"/>
+          </a:ln>
+        </p:spPr>
+        <p:style>
+          <a:lnRef idx="2">
+            <a:schemeClr val="accent1">
+              <a:lumMod val="75000"/>
+            </a:schemeClr>
+          </a:lnRef>
+          <a:fillRef idx="1">
+            <a:schemeClr val="accent1"/>
+          </a:fillRef>
+          <a:effectRef idx="0">
+            <a:srgbClr val="FFFFFF"/>
+          </a:effectRef>
+          <a:fontRef idx="minor">
+            <a:schemeClr val="lt1"/>
+          </a:fontRef>
+        </p:style>
+        <p:txBody>
+          <a:bodyPr vertOverflow="overflow" horzOverflow="overflow" vert="horz" wrap="square" numCol="1" spcCol="0" rtlCol="0" fromWordArt="0" anchor="ctr" anchorCtr="0" forceAA="0" compatLnSpc="1">
+            <a:noAutofit/>
+          </a:bodyPr>
+          <a:p>
+            <a:pPr lvl="0" algn="ctr">
+              <a:buClrTx/>
+              <a:buSzTx/>
+              <a:buFontTx/>
+            </a:pPr>
+            <a:endParaRPr lang="zh-CN" altLang="en-US">
+              <a:sym typeface="+mn-ea"/>
+            </a:endParaRPr>
+          </a:p>
+        </p:txBody>
+      </p:sp>
+      <p:sp>
+        <p:nvSpPr>
+          <p:cNvPr id="12" name="矩形 11"/>
+          <p:cNvSpPr/>
+          <p:nvPr/>
+        </p:nvSpPr>
+        <p:spPr>
+          <a:xfrm>
+            <a:off x="6760801" y="2772000"/>
+            <a:ext cx="2132330" cy="1038860"/>
+          </a:xfrm>
+          <a:prstGeom prst="rect">
+            <a:avLst/>
+          </a:prstGeom>
+          <a:solidFill>
+            <a:srgbClr val="98A651"/>
+          </a:solidFill>
+          <a:ln w="12700" cmpd="sng">
+            <a:solidFill>
+              <a:srgbClr val="04120C"/>
+            </a:solidFill>
+            <a:prstDash val="solid"/>
+          </a:ln>
+        </p:spPr>
+        <p:style>
+          <a:lnRef idx="2">
+            <a:schemeClr val="accent1">
+              <a:lumMod val="75000"/>
+            </a:schemeClr>
+          </a:lnRef>
+          <a:fillRef idx="1">
+            <a:schemeClr val="accent1"/>
+          </a:fillRef>
+          <a:effectRef idx="0">
+            <a:srgbClr val="FFFFFF"/>
+          </a:effectRef>
+          <a:fontRef idx="minor">
+            <a:schemeClr val="lt1"/>
+          </a:fontRef>
+        </p:style>
+        <p:txBody>
+          <a:bodyPr vertOverflow="overflow" horzOverflow="overflow" vert="horz" wrap="square" numCol="1" spcCol="0" rtlCol="0" fromWordArt="0" anchor="ctr" anchorCtr="0" forceAA="0" compatLnSpc="1">
+            <a:noAutofit/>
+          </a:bodyPr>
+          <a:p>
+            <a:pPr lvl="0" algn="ctr">
+              <a:buClrTx/>
+              <a:buSzTx/>
+              <a:buFontTx/>
+            </a:pPr>
+            <a:endParaRPr lang="zh-CN" altLang="en-US">
+              <a:sym typeface="+mn-ea"/>
+            </a:endParaRPr>
+          </a:p>
+        </p:txBody>
+      </p:sp>
+      <p:sp>
+        <p:nvSpPr>
+          <p:cNvPr id="13" name="矩形 12"/>
+          <p:cNvSpPr/>
+          <p:nvPr/>
+        </p:nvSpPr>
+        <p:spPr>
+          <a:xfrm>
+            <a:off x="2499995" y="3812400"/>
+            <a:ext cx="2132330" cy="1038860"/>
+          </a:xfrm>
+          <a:prstGeom prst="rect">
+            <a:avLst/>
+          </a:prstGeom>
+          <a:solidFill>
+            <a:srgbClr val="2A7139"/>
+          </a:solidFill>
+          <a:ln w="12700" cmpd="sng">
+            <a:solidFill>
+              <a:srgbClr val="04120C"/>
+            </a:solidFill>
+            <a:prstDash val="solid"/>
+          </a:ln>
+        </p:spPr>
+        <p:style>
+          <a:lnRef idx="2">
+            <a:schemeClr val="accent1">
+              <a:lumMod val="75000"/>
+            </a:schemeClr>
+          </a:lnRef>
+          <a:fillRef idx="1">
+            <a:schemeClr val="accent1"/>
+          </a:fillRef>
+          <a:effectRef idx="0">
+            <a:srgbClr val="FFFFFF"/>
+          </a:effectRef>
+          <a:fontRef idx="minor">
+            <a:schemeClr val="lt1"/>
+          </a:fontRef>
+        </p:style>
+        <p:txBody>
+          <a:bodyPr vertOverflow="overflow" horzOverflow="overflow" vert="horz" wrap="square" numCol="1" spcCol="0" rtlCol="0" fromWordArt="0" anchor="ctr" anchorCtr="0" forceAA="0" compatLnSpc="1">
+            <a:noAutofit/>
+          </a:bodyPr>
+          <a:p>
+            <a:pPr lvl="0" algn="ctr">
+              <a:buClrTx/>
+              <a:buSzTx/>
+              <a:buFontTx/>
+            </a:pPr>
+            <a:endParaRPr lang="zh-CN" altLang="en-US">
+              <a:sym typeface="+mn-ea"/>
+            </a:endParaRPr>
+          </a:p>
+        </p:txBody>
+      </p:sp>
+      <p:sp>
+        <p:nvSpPr>
+          <p:cNvPr id="14" name="矩形 13"/>
+          <p:cNvSpPr/>
+          <p:nvPr/>
+        </p:nvSpPr>
+        <p:spPr>
+          <a:xfrm>
+            <a:off x="4629600" y="3812400"/>
+            <a:ext cx="2132330" cy="1038860"/>
+          </a:xfrm>
+          <a:prstGeom prst="rect">
+            <a:avLst/>
+          </a:prstGeom>
+          <a:solidFill>
+            <a:srgbClr val="295210"/>
+          </a:solidFill>
+          <a:ln w="12700" cmpd="sng">
+            <a:solidFill>
+              <a:srgbClr val="04120C"/>
+            </a:solidFill>
+            <a:prstDash val="solid"/>
+          </a:ln>
+        </p:spPr>
+        <p:style>
+          <a:lnRef idx="2">
+            <a:schemeClr val="accent1">
+              <a:lumMod val="75000"/>
+            </a:schemeClr>
+          </a:lnRef>
+          <a:fillRef idx="1">
+            <a:schemeClr val="accent1"/>
+          </a:fillRef>
+          <a:effectRef idx="0">
+            <a:srgbClr val="FFFFFF"/>
+          </a:effectRef>
+          <a:fontRef idx="minor">
+            <a:schemeClr val="lt1"/>
+          </a:fontRef>
+        </p:style>
+        <p:txBody>
+          <a:bodyPr vertOverflow="overflow" horzOverflow="overflow" vert="horz" wrap="square" numCol="1" spcCol="0" rtlCol="0" fromWordArt="0" anchor="ctr" anchorCtr="0" forceAA="0" compatLnSpc="1">
+            <a:noAutofit/>
+          </a:bodyPr>
+          <a:p>
+            <a:pPr lvl="0" algn="ctr">
+              <a:buClrTx/>
+              <a:buSzTx/>
+              <a:buFontTx/>
+            </a:pPr>
+            <a:endParaRPr lang="zh-CN" altLang="en-US">
+              <a:sym typeface="+mn-ea"/>
+            </a:endParaRPr>
+          </a:p>
+        </p:txBody>
+      </p:sp>
+      <p:sp>
+        <p:nvSpPr>
+          <p:cNvPr id="15" name="矩形 14"/>
+          <p:cNvSpPr/>
+          <p:nvPr/>
+        </p:nvSpPr>
+        <p:spPr>
+          <a:xfrm>
+            <a:off x="6760801" y="3812400"/>
+            <a:ext cx="2132330" cy="1038860"/>
+          </a:xfrm>
+          <a:prstGeom prst="rect">
+            <a:avLst/>
+          </a:prstGeom>
+          <a:solidFill>
+            <a:srgbClr val="2A7139"/>
+          </a:solidFill>
+          <a:ln w="12700" cmpd="sng">
+            <a:solidFill>
+              <a:srgbClr val="04120C"/>
+            </a:solidFill>
+            <a:prstDash val="solid"/>
+          </a:ln>
+        </p:spPr>
+        <p:style>
+          <a:lnRef idx="2">
+            <a:schemeClr val="accent1">
+              <a:lumMod val="75000"/>
+            </a:schemeClr>
+          </a:lnRef>
+          <a:fillRef idx="1">
+            <a:schemeClr val="accent1"/>
+          </a:fillRef>
+          <a:effectRef idx="0">
+            <a:srgbClr val="FFFFFF"/>
+          </a:effectRef>
+          <a:fontRef idx="minor">
+            <a:schemeClr val="lt1"/>
+          </a:fontRef>
+        </p:style>
+        <p:txBody>
+          <a:bodyPr vertOverflow="overflow" horzOverflow="overflow" vert="horz" wrap="square" numCol="1" spcCol="0" rtlCol="0" fromWordArt="0" anchor="ctr" anchorCtr="0" forceAA="0" compatLnSpc="1">
+            <a:noAutofit/>
+          </a:bodyPr>
+          <a:p>
+            <a:pPr lvl="0" algn="ctr">
+              <a:buClrTx/>
+              <a:buSzTx/>
+              <a:buFontTx/>
+            </a:pPr>
+            <a:endParaRPr lang="zh-CN" altLang="en-US">
+              <a:sym typeface="+mn-ea"/>
+            </a:endParaRPr>
+          </a:p>
+        </p:txBody>
+      </p:sp>
+      <p:sp>
+        <p:nvSpPr>
+          <p:cNvPr id="16" name="矩形 15"/>
+          <p:cNvSpPr/>
+          <p:nvPr/>
+        </p:nvSpPr>
+        <p:spPr>
+          <a:xfrm>
+            <a:off x="0" y="0"/>
+            <a:ext cx="2011680" cy="1205230"/>
+          </a:xfrm>
+          <a:prstGeom prst="rect">
+            <a:avLst/>
+          </a:prstGeom>
+          <a:noFill/>
+          <a:ln>
+            <a:noFill/>
+          </a:ln>
+        </p:spPr>
+        <p:txBody>
+          <a:bodyPr wrap="none" rtlCol="0" anchor="t">
+            <a:noAutofit/>
+          </a:bodyPr>
+          <a:p>
+            <a:pPr algn="ctr"/>
+            <a:r>
+              <a:rPr lang="zh-CN" altLang="en-US" sz="7200" b="1">
+                <a:solidFill>
+                  <a:schemeClr val="accent1"/>
+                </a:solidFill>
+                <a:effectLst>
+                  <a:outerShdw blurRad="38100" dist="25400" dir="5400000" algn="ctr" rotWithShape="0">
+                    <a:srgbClr val="6E747A">
+                      <a:alpha val="43000"/>
+                    </a:srgbClr>
+                  </a:outerShdw>
+                </a:effectLst>
+              </a:rPr>
+              <a:t>蓝方</a:t>
+            </a:r>
+            <a:endParaRPr lang="zh-CN" altLang="en-US" sz="7200" b="1">
+              <a:solidFill>
+                <a:schemeClr val="accent1"/>
+              </a:solidFill>
+              <a:effectLst>
+                <a:outerShdw blurRad="38100" dist="25400" dir="5400000" algn="ctr" rotWithShape="0">
+                  <a:srgbClr val="6E747A">
+                    <a:alpha val="43000"/>
+                  </a:srgbClr>
+                </a:outerShdw>
+              </a:effectLst>
+            </a:endParaRPr>
+          </a:p>
+        </p:txBody>
+      </p:sp>
+      <p:sp>
+        <p:nvSpPr>
+          <p:cNvPr id="18" name="矩形 17"/>
+          <p:cNvSpPr/>
+          <p:nvPr/>
+        </p:nvSpPr>
+        <p:spPr>
+          <a:xfrm>
+            <a:off x="4168140" y="1331595"/>
+            <a:ext cx="464820" cy="398780"/>
+          </a:xfrm>
+          <a:prstGeom prst="rect">
+            <a:avLst/>
+          </a:prstGeom>
+          <a:noFill/>
+          <a:ln>
+            <a:noFill/>
+          </a:ln>
+        </p:spPr>
+        <p:txBody>
+          <a:bodyPr wrap="none" rtlCol="0" anchor="t">
+            <a:spAutoFit/>
+          </a:bodyPr>
+          <a:p>
+            <a:pPr algn="ctr"/>
+            <a:r>
+              <a:rPr lang="en-US" altLang="zh-CN" sz="2000" b="1">
+                <a:solidFill>
+                  <a:schemeClr val="bg1"/>
+                </a:solidFill>
+                <a:effectLst>
+                  <a:outerShdw blurRad="38100" dist="19050" dir="2700000" algn="tl" rotWithShape="0">
+                    <a:srgbClr val="04120C">
+                      <a:alpha val="40000"/>
+                    </a:srgbClr>
+                  </a:outerShdw>
+                </a:effectLst>
+              </a:rPr>
+              <a:t>10</a:t>
+            </a:r>
+            <a:endParaRPr lang="en-US" altLang="zh-CN" sz="2000" b="1">
+              <a:solidFill>
+                <a:schemeClr val="bg1"/>
+              </a:solidFill>
+              <a:effectLst>
+                <a:outerShdw blurRad="38100" dist="19050" dir="2700000" algn="tl" rotWithShape="0">
+                  <a:srgbClr val="04120C">
+                    <a:alpha val="40000"/>
+                  </a:srgbClr>
+                </a:outerShdw>
+              </a:effectLst>
+            </a:endParaRPr>
+          </a:p>
+        </p:txBody>
+      </p:sp>
+      <p:sp>
+        <p:nvSpPr>
+          <p:cNvPr id="19" name="矩形 18"/>
+          <p:cNvSpPr/>
+          <p:nvPr/>
+        </p:nvSpPr>
+        <p:spPr>
+          <a:xfrm>
+            <a:off x="6305233" y="1331595"/>
+            <a:ext cx="450215" cy="398780"/>
+          </a:xfrm>
+          <a:prstGeom prst="rect">
+            <a:avLst/>
+          </a:prstGeom>
+          <a:noFill/>
+          <a:ln>
+            <a:noFill/>
+          </a:ln>
+        </p:spPr>
+        <p:txBody>
+          <a:bodyPr wrap="none" rtlCol="0" anchor="t">
+            <a:spAutoFit/>
+          </a:bodyPr>
+          <a:p>
+            <a:pPr algn="ctr"/>
+            <a:r>
+              <a:rPr lang="en-US" altLang="zh-CN" sz="2000" b="1">
+                <a:solidFill>
+                  <a:schemeClr val="bg1"/>
+                </a:solidFill>
+                <a:effectLst>
+                  <a:outerShdw blurRad="38100" dist="19050" dir="2700000" algn="tl" rotWithShape="0">
+                    <a:srgbClr val="04120C">
+                      <a:alpha val="40000"/>
+                    </a:srgbClr>
+                  </a:outerShdw>
+                </a:effectLst>
+              </a:rPr>
+              <a:t>11</a:t>
+            </a:r>
+            <a:endParaRPr lang="en-US" altLang="zh-CN" sz="2000" b="1">
+              <a:solidFill>
+                <a:schemeClr val="bg1"/>
+              </a:solidFill>
+              <a:effectLst>
+                <a:outerShdw blurRad="38100" dist="19050" dir="2700000" algn="tl" rotWithShape="0">
+                  <a:srgbClr val="04120C">
+                    <a:alpha val="40000"/>
+                  </a:srgbClr>
+                </a:outerShdw>
+              </a:effectLst>
+            </a:endParaRPr>
+          </a:p>
+        </p:txBody>
+      </p:sp>
+      <p:sp>
+        <p:nvSpPr>
+          <p:cNvPr id="20" name="矩形 19"/>
+          <p:cNvSpPr/>
+          <p:nvPr/>
+        </p:nvSpPr>
+        <p:spPr>
+          <a:xfrm>
+            <a:off x="8569325" y="2372995"/>
+            <a:ext cx="323850" cy="398780"/>
+          </a:xfrm>
+          <a:prstGeom prst="rect">
+            <a:avLst/>
+          </a:prstGeom>
+          <a:noFill/>
+          <a:ln>
+            <a:noFill/>
+          </a:ln>
+        </p:spPr>
+        <p:txBody>
+          <a:bodyPr wrap="none" rtlCol="0" anchor="t">
+            <a:spAutoFit/>
+          </a:bodyPr>
+          <a:p>
+            <a:pPr algn="ctr"/>
+            <a:r>
+              <a:rPr lang="en-US" altLang="zh-CN" sz="2000" b="1">
+                <a:solidFill>
+                  <a:schemeClr val="bg1"/>
+                </a:solidFill>
+                <a:effectLst>
+                  <a:outerShdw blurRad="38100" dist="19050" dir="2700000" algn="tl" rotWithShape="0">
+                    <a:srgbClr val="04120C">
+                      <a:alpha val="40000"/>
+                    </a:srgbClr>
+                  </a:outerShdw>
+                </a:effectLst>
+              </a:rPr>
+              <a:t>9</a:t>
+            </a:r>
+            <a:endParaRPr lang="en-US" altLang="zh-CN" sz="2000" b="1">
+              <a:solidFill>
+                <a:schemeClr val="bg1"/>
+              </a:solidFill>
+              <a:effectLst>
+                <a:outerShdw blurRad="38100" dist="19050" dir="2700000" algn="tl" rotWithShape="0">
+                  <a:srgbClr val="04120C">
+                    <a:alpha val="40000"/>
+                  </a:srgbClr>
+                </a:outerShdw>
+              </a:effectLst>
+            </a:endParaRPr>
+          </a:p>
+        </p:txBody>
+      </p:sp>
+      <p:sp>
+        <p:nvSpPr>
+          <p:cNvPr id="21" name="矩形 20"/>
+          <p:cNvSpPr/>
+          <p:nvPr/>
+        </p:nvSpPr>
+        <p:spPr>
+          <a:xfrm>
+            <a:off x="4307205" y="2372995"/>
+            <a:ext cx="323850" cy="398780"/>
+          </a:xfrm>
+          <a:prstGeom prst="rect">
+            <a:avLst/>
+          </a:prstGeom>
+          <a:noFill/>
+          <a:ln>
+            <a:noFill/>
+          </a:ln>
+        </p:spPr>
+        <p:txBody>
+          <a:bodyPr wrap="none" rtlCol="0" anchor="t">
+            <a:spAutoFit/>
+          </a:bodyPr>
+          <a:p>
+            <a:pPr algn="ctr"/>
+            <a:r>
+              <a:rPr lang="en-US" altLang="zh-CN" sz="2000" b="1">
+                <a:solidFill>
+                  <a:schemeClr val="bg1"/>
+                </a:solidFill>
+                <a:effectLst>
+                  <a:outerShdw blurRad="38100" dist="19050" dir="2700000" algn="tl" rotWithShape="0">
+                    <a:srgbClr val="04120C">
+                      <a:alpha val="40000"/>
+                    </a:srgbClr>
+                  </a:outerShdw>
+                </a:effectLst>
+              </a:rPr>
+              <a:t>7</a:t>
+            </a:r>
+            <a:endParaRPr lang="en-US" altLang="zh-CN" sz="2000" b="1">
+              <a:solidFill>
+                <a:schemeClr val="bg1"/>
+              </a:solidFill>
+              <a:effectLst>
+                <a:outerShdw blurRad="38100" dist="19050" dir="2700000" algn="tl" rotWithShape="0">
+                  <a:srgbClr val="04120C">
+                    <a:alpha val="40000"/>
+                  </a:srgbClr>
+                </a:outerShdw>
+              </a:effectLst>
+            </a:endParaRPr>
+          </a:p>
+        </p:txBody>
+      </p:sp>
+      <p:sp>
+        <p:nvSpPr>
+          <p:cNvPr id="22" name="矩形 21"/>
+          <p:cNvSpPr/>
+          <p:nvPr/>
+        </p:nvSpPr>
+        <p:spPr>
+          <a:xfrm>
+            <a:off x="6438265" y="2372995"/>
+            <a:ext cx="323850" cy="398780"/>
+          </a:xfrm>
+          <a:prstGeom prst="rect">
+            <a:avLst/>
+          </a:prstGeom>
+          <a:noFill/>
+          <a:ln>
+            <a:noFill/>
+          </a:ln>
+        </p:spPr>
+        <p:txBody>
+          <a:bodyPr wrap="none" rtlCol="0" anchor="t">
+            <a:spAutoFit/>
+          </a:bodyPr>
+          <a:p>
+            <a:pPr algn="ctr"/>
+            <a:r>
+              <a:rPr lang="en-US" altLang="zh-CN" sz="2000" b="1">
+                <a:solidFill>
+                  <a:schemeClr val="bg1"/>
+                </a:solidFill>
+                <a:effectLst>
+                  <a:outerShdw blurRad="38100" dist="19050" dir="2700000" algn="tl" rotWithShape="0">
+                    <a:srgbClr val="04120C">
+                      <a:alpha val="40000"/>
+                    </a:srgbClr>
+                  </a:outerShdw>
+                </a:effectLst>
+              </a:rPr>
+              <a:t>8</a:t>
+            </a:r>
+            <a:endParaRPr lang="en-US" altLang="zh-CN" sz="2000" b="1">
+              <a:solidFill>
+                <a:schemeClr val="bg1"/>
+              </a:solidFill>
+              <a:effectLst>
+                <a:outerShdw blurRad="38100" dist="19050" dir="2700000" algn="tl" rotWithShape="0">
+                  <a:srgbClr val="04120C">
+                    <a:alpha val="40000"/>
+                  </a:srgbClr>
+                </a:outerShdw>
+              </a:effectLst>
+            </a:endParaRPr>
+          </a:p>
+        </p:txBody>
+      </p:sp>
+      <p:sp>
+        <p:nvSpPr>
+          <p:cNvPr id="23" name="矩形 22"/>
+          <p:cNvSpPr/>
+          <p:nvPr/>
+        </p:nvSpPr>
+        <p:spPr>
+          <a:xfrm>
+            <a:off x="8569325" y="3413125"/>
+            <a:ext cx="323850" cy="398780"/>
+          </a:xfrm>
+          <a:prstGeom prst="rect">
+            <a:avLst/>
+          </a:prstGeom>
+          <a:noFill/>
+          <a:ln>
+            <a:noFill/>
+          </a:ln>
+        </p:spPr>
+        <p:txBody>
+          <a:bodyPr wrap="none" rtlCol="0" anchor="t">
+            <a:spAutoFit/>
+          </a:bodyPr>
+          <a:p>
+            <a:pPr algn="ctr"/>
+            <a:r>
+              <a:rPr lang="en-US" altLang="zh-CN" sz="2000" b="1">
+                <a:solidFill>
+                  <a:schemeClr val="bg1"/>
+                </a:solidFill>
+                <a:effectLst>
+                  <a:outerShdw blurRad="38100" dist="19050" dir="2700000" algn="tl" rotWithShape="0">
+                    <a:srgbClr val="04120C">
+                      <a:alpha val="40000"/>
+                    </a:srgbClr>
+                  </a:outerShdw>
+                </a:effectLst>
+              </a:rPr>
+              <a:t>6</a:t>
+            </a:r>
+            <a:endParaRPr lang="en-US" altLang="zh-CN" sz="2000" b="1">
+              <a:solidFill>
+                <a:schemeClr val="bg1"/>
+              </a:solidFill>
+              <a:effectLst>
+                <a:outerShdw blurRad="38100" dist="19050" dir="2700000" algn="tl" rotWithShape="0">
+                  <a:srgbClr val="04120C">
+                    <a:alpha val="40000"/>
+                  </a:srgbClr>
+                </a:outerShdw>
+              </a:effectLst>
+            </a:endParaRPr>
+          </a:p>
+        </p:txBody>
+      </p:sp>
+      <p:sp>
+        <p:nvSpPr>
+          <p:cNvPr id="25" name="矩形 24"/>
+          <p:cNvSpPr/>
+          <p:nvPr/>
+        </p:nvSpPr>
+        <p:spPr>
+          <a:xfrm>
+            <a:off x="4307205" y="3414395"/>
+            <a:ext cx="323850" cy="398780"/>
+          </a:xfrm>
+          <a:prstGeom prst="rect">
+            <a:avLst/>
+          </a:prstGeom>
+          <a:noFill/>
+          <a:ln>
+            <a:noFill/>
+          </a:ln>
+        </p:spPr>
+        <p:txBody>
+          <a:bodyPr wrap="none" rtlCol="0" anchor="t">
+            <a:spAutoFit/>
+          </a:bodyPr>
+          <a:p>
+            <a:pPr algn="ctr"/>
+            <a:r>
+              <a:rPr lang="en-US" altLang="zh-CN" sz="2000" b="1">
+                <a:solidFill>
+                  <a:schemeClr val="bg1"/>
+                </a:solidFill>
+                <a:effectLst>
+                  <a:outerShdw blurRad="38100" dist="19050" dir="2700000" algn="tl" rotWithShape="0">
+                    <a:srgbClr val="04120C">
+                      <a:alpha val="40000"/>
+                    </a:srgbClr>
+                  </a:outerShdw>
+                </a:effectLst>
+              </a:rPr>
+              <a:t>4</a:t>
+            </a:r>
+            <a:endParaRPr lang="en-US" altLang="zh-CN" sz="2000" b="1">
+              <a:solidFill>
+                <a:schemeClr val="bg1"/>
+              </a:solidFill>
+              <a:effectLst>
+                <a:outerShdw blurRad="38100" dist="19050" dir="2700000" algn="tl" rotWithShape="0">
+                  <a:srgbClr val="04120C">
+                    <a:alpha val="40000"/>
+                  </a:srgbClr>
+                </a:outerShdw>
+              </a:effectLst>
+            </a:endParaRPr>
+          </a:p>
+        </p:txBody>
+      </p:sp>
+      <p:sp>
+        <p:nvSpPr>
+          <p:cNvPr id="26" name="矩形 25"/>
+          <p:cNvSpPr/>
+          <p:nvPr/>
+        </p:nvSpPr>
+        <p:spPr>
+          <a:xfrm>
+            <a:off x="6438265" y="3414395"/>
+            <a:ext cx="323850" cy="398780"/>
+          </a:xfrm>
+          <a:prstGeom prst="rect">
+            <a:avLst/>
+          </a:prstGeom>
+          <a:noFill/>
+          <a:ln>
+            <a:noFill/>
+          </a:ln>
+        </p:spPr>
+        <p:txBody>
+          <a:bodyPr wrap="none" rtlCol="0" anchor="t">
+            <a:spAutoFit/>
+          </a:bodyPr>
+          <a:p>
+            <a:pPr algn="ctr"/>
+            <a:r>
+              <a:rPr lang="en-US" altLang="zh-CN" sz="2000" b="1">
+                <a:solidFill>
+                  <a:schemeClr val="bg1"/>
+                </a:solidFill>
+                <a:effectLst>
+                  <a:outerShdw blurRad="38100" dist="19050" dir="2700000" algn="tl" rotWithShape="0">
+                    <a:srgbClr val="04120C">
+                      <a:alpha val="40000"/>
+                    </a:srgbClr>
+                  </a:outerShdw>
+                </a:effectLst>
+              </a:rPr>
+              <a:t>5</a:t>
+            </a:r>
+            <a:endParaRPr lang="en-US" altLang="zh-CN" sz="2000" b="1">
+              <a:solidFill>
+                <a:schemeClr val="bg1"/>
+              </a:solidFill>
+              <a:effectLst>
+                <a:outerShdw blurRad="38100" dist="19050" dir="2700000" algn="tl" rotWithShape="0">
+                  <a:srgbClr val="04120C">
+                    <a:alpha val="40000"/>
+                  </a:srgbClr>
+                </a:outerShdw>
+              </a:effectLst>
+            </a:endParaRPr>
+          </a:p>
+        </p:txBody>
+      </p:sp>
+      <p:sp>
+        <p:nvSpPr>
+          <p:cNvPr id="27" name="矩形 26"/>
+          <p:cNvSpPr/>
+          <p:nvPr/>
+        </p:nvSpPr>
+        <p:spPr>
+          <a:xfrm>
+            <a:off x="6438265" y="4455795"/>
+            <a:ext cx="323850" cy="398780"/>
+          </a:xfrm>
+          <a:prstGeom prst="rect">
+            <a:avLst/>
+          </a:prstGeom>
+          <a:noFill/>
+          <a:ln>
+            <a:noFill/>
+          </a:ln>
+        </p:spPr>
+        <p:txBody>
+          <a:bodyPr wrap="none" rtlCol="0" anchor="t">
+            <a:spAutoFit/>
+          </a:bodyPr>
+          <a:p>
+            <a:pPr algn="ctr"/>
+            <a:r>
+              <a:rPr lang="en-US" altLang="zh-CN" sz="2000" b="1">
+                <a:solidFill>
+                  <a:schemeClr val="bg1"/>
+                </a:solidFill>
+                <a:effectLst>
+                  <a:outerShdw blurRad="38100" dist="19050" dir="2700000" algn="tl" rotWithShape="0">
+                    <a:srgbClr val="04120C">
+                      <a:alpha val="40000"/>
+                    </a:srgbClr>
+                  </a:outerShdw>
+                </a:effectLst>
+              </a:rPr>
+              <a:t>2</a:t>
+            </a:r>
+            <a:endParaRPr lang="en-US" altLang="zh-CN" sz="2000" b="1">
+              <a:solidFill>
+                <a:schemeClr val="bg1"/>
+              </a:solidFill>
+              <a:effectLst>
+                <a:outerShdw blurRad="38100" dist="19050" dir="2700000" algn="tl" rotWithShape="0">
+                  <a:srgbClr val="04120C">
+                    <a:alpha val="40000"/>
+                  </a:srgbClr>
+                </a:outerShdw>
+              </a:effectLst>
+            </a:endParaRPr>
+          </a:p>
+        </p:txBody>
+      </p:sp>
+      <p:sp>
+        <p:nvSpPr>
+          <p:cNvPr id="28" name="矩形 27"/>
+          <p:cNvSpPr/>
+          <p:nvPr/>
+        </p:nvSpPr>
+        <p:spPr>
+          <a:xfrm>
+            <a:off x="8569325" y="4453255"/>
+            <a:ext cx="323850" cy="398780"/>
+          </a:xfrm>
+          <a:prstGeom prst="rect">
+            <a:avLst/>
+          </a:prstGeom>
+          <a:noFill/>
+          <a:ln>
+            <a:noFill/>
+          </a:ln>
+        </p:spPr>
+        <p:txBody>
+          <a:bodyPr wrap="none" rtlCol="0" anchor="t">
+            <a:spAutoFit/>
+          </a:bodyPr>
+          <a:p>
+            <a:pPr algn="ctr"/>
+            <a:r>
+              <a:rPr lang="en-US" altLang="zh-CN" sz="2000" b="1">
+                <a:solidFill>
+                  <a:schemeClr val="bg1"/>
+                </a:solidFill>
+                <a:effectLst>
+                  <a:outerShdw blurRad="38100" dist="19050" dir="2700000" algn="tl" rotWithShape="0">
+                    <a:srgbClr val="04120C">
+                      <a:alpha val="40000"/>
+                    </a:srgbClr>
+                  </a:outerShdw>
+                </a:effectLst>
+              </a:rPr>
+              <a:t>3</a:t>
+            </a:r>
+            <a:endParaRPr lang="en-US" altLang="zh-CN" sz="2000" b="1">
+              <a:solidFill>
+                <a:schemeClr val="bg1"/>
+              </a:solidFill>
+              <a:effectLst>
+                <a:outerShdw blurRad="38100" dist="19050" dir="2700000" algn="tl" rotWithShape="0">
+                  <a:srgbClr val="04120C">
+                    <a:alpha val="40000"/>
+                  </a:srgbClr>
+                </a:outerShdw>
+              </a:effectLst>
+            </a:endParaRPr>
+          </a:p>
+        </p:txBody>
+      </p:sp>
+      <p:sp>
+        <p:nvSpPr>
+          <p:cNvPr id="29" name="矩形 28"/>
+          <p:cNvSpPr/>
+          <p:nvPr/>
+        </p:nvSpPr>
+        <p:spPr>
+          <a:xfrm>
+            <a:off x="8428355" y="1332865"/>
+            <a:ext cx="464820" cy="398780"/>
+          </a:xfrm>
+          <a:prstGeom prst="rect">
+            <a:avLst/>
+          </a:prstGeom>
+          <a:noFill/>
+          <a:ln>
+            <a:noFill/>
+          </a:ln>
+        </p:spPr>
+        <p:txBody>
+          <a:bodyPr wrap="none" rtlCol="0" anchor="t">
+            <a:spAutoFit/>
+          </a:bodyPr>
+          <a:p>
+            <a:pPr algn="ctr"/>
+            <a:r>
+              <a:rPr lang="en-US" altLang="zh-CN" sz="2000" b="1">
+                <a:solidFill>
+                  <a:schemeClr val="bg1"/>
+                </a:solidFill>
+                <a:effectLst>
+                  <a:outerShdw blurRad="38100" dist="19050" dir="2700000" algn="tl" rotWithShape="0">
+                    <a:srgbClr val="04120C">
+                      <a:alpha val="40000"/>
+                    </a:srgbClr>
+                  </a:outerShdw>
+                </a:effectLst>
+              </a:rPr>
+              <a:t>12</a:t>
+            </a:r>
+            <a:endParaRPr lang="en-US" altLang="zh-CN" sz="2000" b="1">
+              <a:solidFill>
+                <a:schemeClr val="bg1"/>
+              </a:solidFill>
+              <a:effectLst>
+                <a:outerShdw blurRad="38100" dist="19050" dir="2700000" algn="tl" rotWithShape="0">
+                  <a:srgbClr val="04120C">
+                    <a:alpha val="40000"/>
+                  </a:srgbClr>
+                </a:outerShdw>
+              </a:effectLst>
+            </a:endParaRPr>
+          </a:p>
+        </p:txBody>
+      </p:sp>
+      <p:sp>
+        <p:nvSpPr>
+          <p:cNvPr id="30" name="矩形 29"/>
+          <p:cNvSpPr/>
+          <p:nvPr/>
+        </p:nvSpPr>
+        <p:spPr>
+          <a:xfrm>
+            <a:off x="4307205" y="4455795"/>
+            <a:ext cx="323850" cy="398780"/>
+          </a:xfrm>
+          <a:prstGeom prst="rect">
+            <a:avLst/>
+          </a:prstGeom>
+          <a:noFill/>
+          <a:ln>
+            <a:noFill/>
+          </a:ln>
+        </p:spPr>
+        <p:txBody>
+          <a:bodyPr wrap="none" rtlCol="0" anchor="t">
+            <a:spAutoFit/>
+          </a:bodyPr>
+          <a:p>
+            <a:pPr algn="ctr"/>
+            <a:r>
+              <a:rPr lang="en-US" altLang="zh-CN" sz="2000" b="1">
+                <a:solidFill>
+                  <a:schemeClr val="bg1"/>
+                </a:solidFill>
+                <a:effectLst>
+                  <a:outerShdw blurRad="38100" dist="19050" dir="2700000" algn="tl" rotWithShape="0">
+                    <a:srgbClr val="04120C">
+                      <a:alpha val="40000"/>
+                    </a:srgbClr>
+                  </a:outerShdw>
+                </a:effectLst>
+              </a:rPr>
+              <a:t>1</a:t>
+            </a:r>
+            <a:endParaRPr lang="en-US" altLang="zh-CN" sz="2000" b="1">
+              <a:solidFill>
+                <a:schemeClr val="bg1"/>
+              </a:solidFill>
+              <a:effectLst>
+                <a:outerShdw blurRad="38100" dist="19050" dir="2700000" algn="tl" rotWithShape="0">
+                  <a:srgbClr val="04120C">
+                    <a:alpha val="40000"/>
+                  </a:srgbClr>
+                </a:outerShdw>
+              </a:effectLst>
+            </a:endParaRPr>
+          </a:p>
+        </p:txBody>
+      </p:sp>
+      <p:sp>
+        <p:nvSpPr>
+          <p:cNvPr id="32" name="圆角矩形 31"/>
+          <p:cNvSpPr/>
+          <p:nvPr/>
+        </p:nvSpPr>
+        <p:spPr>
+          <a:xfrm>
+            <a:off x="1886585" y="5373370"/>
+            <a:ext cx="2356485" cy="921385"/>
+          </a:xfrm>
+          <a:prstGeom prst="roundRect">
+            <a:avLst/>
+          </a:prstGeom>
+          <a:solidFill>
+            <a:schemeClr val="accent2"/>
+          </a:solidFill>
+        </p:spPr>
+        <p:style>
+          <a:lnRef idx="2">
+            <a:schemeClr val="accent1">
+              <a:lumMod val="75000"/>
+            </a:schemeClr>
+          </a:lnRef>
+          <a:fillRef idx="1">
+            <a:schemeClr val="accent1"/>
+          </a:fillRef>
+          <a:effectRef idx="0">
+            <a:srgbClr val="FFFFFF"/>
+          </a:effectRef>
+          <a:fontRef idx="minor">
+            <a:schemeClr val="lt1"/>
+          </a:fontRef>
+        </p:style>
+        <p:txBody>
+          <a:bodyPr vertOverflow="overflow" horzOverflow="overflow" vert="horz" wrap="square" numCol="1" spcCol="0" rtlCol="0" fromWordArt="0" anchor="ctr" anchorCtr="0" forceAA="0" compatLnSpc="1">
+            <a:noAutofit/>
+          </a:bodyPr>
+          <a:p>
+            <a:pPr lvl="0" algn="ctr">
+              <a:buClrTx/>
+              <a:buSzTx/>
+              <a:buFontTx/>
+            </a:pPr>
+            <a:endParaRPr lang="zh-CN" altLang="en-US">
+              <a:sym typeface="+mn-ea"/>
+            </a:endParaRPr>
+          </a:p>
+        </p:txBody>
+      </p:sp>
+      <p:sp>
+        <p:nvSpPr>
+          <p:cNvPr id="33" name="圆角矩形 32"/>
+          <p:cNvSpPr/>
+          <p:nvPr/>
+        </p:nvSpPr>
+        <p:spPr>
+          <a:xfrm>
+            <a:off x="4917440" y="5373370"/>
+            <a:ext cx="2356485" cy="921385"/>
+          </a:xfrm>
+          <a:prstGeom prst="roundRect">
+            <a:avLst/>
+          </a:prstGeom>
+          <a:solidFill>
+            <a:schemeClr val="bg2"/>
+          </a:solidFill>
+        </p:spPr>
+        <p:style>
+          <a:lnRef idx="2">
+            <a:schemeClr val="accent1">
+              <a:lumMod val="75000"/>
+            </a:schemeClr>
+          </a:lnRef>
+          <a:fillRef idx="1">
+            <a:schemeClr val="accent1"/>
+          </a:fillRef>
+          <a:effectRef idx="0">
+            <a:srgbClr val="FFFFFF"/>
+          </a:effectRef>
+          <a:fontRef idx="minor">
+            <a:schemeClr val="lt1"/>
+          </a:fontRef>
+        </p:style>
+        <p:txBody>
+          <a:bodyPr rtlCol="0" anchor="ctr"/>
+          <a:p>
+            <a:pPr algn="ctr"/>
+            <a:endParaRPr lang="zh-CN" altLang="en-US"/>
+          </a:p>
+        </p:txBody>
+      </p:sp>
+      <p:sp>
+        <p:nvSpPr>
+          <p:cNvPr id="34" name="圆角矩形 33"/>
+          <p:cNvSpPr/>
+          <p:nvPr/>
+        </p:nvSpPr>
+        <p:spPr>
+          <a:xfrm>
+            <a:off x="7948295" y="5373370"/>
+            <a:ext cx="2356485" cy="921385"/>
+          </a:xfrm>
+          <a:prstGeom prst="roundRect">
+            <a:avLst/>
+          </a:prstGeom>
+          <a:solidFill>
+            <a:schemeClr val="bg2"/>
+          </a:solidFill>
+        </p:spPr>
+        <p:style>
+          <a:lnRef idx="2">
+            <a:schemeClr val="accent1">
+              <a:lumMod val="75000"/>
+            </a:schemeClr>
+          </a:lnRef>
+          <a:fillRef idx="1">
+            <a:schemeClr val="accent1"/>
+          </a:fillRef>
+          <a:effectRef idx="0">
+            <a:srgbClr val="FFFFFF"/>
+          </a:effectRef>
+          <a:fontRef idx="minor">
+            <a:schemeClr val="lt1"/>
+          </a:fontRef>
+        </p:style>
+        <p:txBody>
+          <a:bodyPr rtlCol="0" anchor="ctr"/>
+          <a:p>
+            <a:pPr algn="ctr"/>
+            <a:endParaRPr lang="zh-CN" altLang="en-US"/>
+          </a:p>
+        </p:txBody>
+      </p:sp>
+    </p:spTree>
+    <p:custDataLst>
+      <p:tags r:id="rId1"/>
+    </p:custDataLst>
+  </p:cSld>
+  <p:clrMapOvr>
+    <a:masterClrMapping/>
+  </p:clrMapOvr>
+</p:sld>
+</file>
+
+<file path=ppt/slides/slide4.xml><?xml version="1.0" encoding="utf-8"?>
+<p:sld xmlns:a="http://schemas.openxmlformats.org/drawingml/2006/main" xmlns:r="http://schemas.openxmlformats.org/officeDocument/2006/relationships" xmlns:p="http://schemas.openxmlformats.org/presentationml/2006/main">
+  <p:cSld>
+    <p:spTree>
+      <p:nvGrpSpPr>
+        <p:cNvPr id="1" name=""/>
+        <p:cNvGrpSpPr/>
+        <p:nvPr/>
+      </p:nvGrpSpPr>
+      <p:grpSpPr>
+        <a:xfrm>
+          <a:off x="0" y="0"/>
+          <a:ext cx="0" cy="0"/>
+          <a:chOff x="0" y="0"/>
+          <a:chExt cx="0" cy="0"/>
+        </a:xfrm>
+      </p:grpSpPr>
       <p:sp>
         <p:nvSpPr>
           <p:cNvPr id="2" name="矩形 1"/>
@@ -6136,6 +7669,140 @@
           </a:p>
         </p:txBody>
       </p:sp>
+      <p:sp>
+        <p:nvSpPr>
+          <p:cNvPr id="29" name="圆角矩形 28"/>
+          <p:cNvSpPr/>
+          <p:nvPr/>
+        </p:nvSpPr>
+        <p:spPr>
+          <a:xfrm>
+            <a:off x="1886585" y="5373370"/>
+            <a:ext cx="2356485" cy="921385"/>
+          </a:xfrm>
+          <a:prstGeom prst="roundRect">
+            <a:avLst/>
+          </a:prstGeom>
+          <a:solidFill>
+            <a:schemeClr val="accent2"/>
+          </a:solidFill>
+        </p:spPr>
+        <p:style>
+          <a:lnRef idx="2">
+            <a:schemeClr val="accent1">
+              <a:lumMod val="75000"/>
+            </a:schemeClr>
+          </a:lnRef>
+          <a:fillRef idx="1">
+            <a:schemeClr val="accent1"/>
+          </a:fillRef>
+          <a:effectRef idx="0">
+            <a:srgbClr val="FFFFFF"/>
+          </a:effectRef>
+          <a:fontRef idx="minor">
+            <a:schemeClr val="lt1"/>
+          </a:fontRef>
+        </p:style>
+        <p:txBody>
+          <a:bodyPr vertOverflow="overflow" horzOverflow="overflow" vert="horz" wrap="square" numCol="1" spcCol="0" rtlCol="0" fromWordArt="0" anchor="ctr" anchorCtr="0" forceAA="0" compatLnSpc="1">
+            <a:noAutofit/>
+          </a:bodyPr>
+          <a:p>
+            <a:pPr lvl="0" algn="ctr">
+              <a:buClrTx/>
+              <a:buSzTx/>
+              <a:buFontTx/>
+            </a:pPr>
+            <a:endParaRPr lang="zh-CN" altLang="en-US">
+              <a:sym typeface="+mn-ea"/>
+            </a:endParaRPr>
+          </a:p>
+        </p:txBody>
+      </p:sp>
+      <p:sp>
+        <p:nvSpPr>
+          <p:cNvPr id="30" name="圆角矩形 29"/>
+          <p:cNvSpPr/>
+          <p:nvPr/>
+        </p:nvSpPr>
+        <p:spPr>
+          <a:xfrm>
+            <a:off x="4917440" y="5373370"/>
+            <a:ext cx="2356485" cy="921385"/>
+          </a:xfrm>
+          <a:prstGeom prst="roundRect">
+            <a:avLst/>
+          </a:prstGeom>
+          <a:solidFill>
+            <a:schemeClr val="bg2"/>
+          </a:solidFill>
+        </p:spPr>
+        <p:style>
+          <a:lnRef idx="2">
+            <a:schemeClr val="accent1">
+              <a:lumMod val="75000"/>
+            </a:schemeClr>
+          </a:lnRef>
+          <a:fillRef idx="1">
+            <a:schemeClr val="accent1"/>
+          </a:fillRef>
+          <a:effectRef idx="0">
+            <a:srgbClr val="FFFFFF"/>
+          </a:effectRef>
+          <a:fontRef idx="minor">
+            <a:schemeClr val="lt1"/>
+          </a:fontRef>
+        </p:style>
+        <p:txBody>
+          <a:bodyPr rtlCol="0" anchor="ctr"/>
+          <a:p>
+            <a:pPr algn="ctr"/>
+            <a:endParaRPr lang="zh-CN" altLang="en-US"/>
+          </a:p>
+        </p:txBody>
+      </p:sp>
+      <p:sp>
+        <p:nvSpPr>
+          <p:cNvPr id="31" name="圆角矩形 30"/>
+          <p:cNvSpPr/>
+          <p:nvPr/>
+        </p:nvSpPr>
+        <p:spPr>
+          <a:xfrm>
+            <a:off x="7948295" y="5373370"/>
+            <a:ext cx="2356485" cy="921385"/>
+          </a:xfrm>
+          <a:prstGeom prst="roundRect">
+            <a:avLst/>
+          </a:prstGeom>
+          <a:solidFill>
+            <a:schemeClr val="bg2"/>
+          </a:solidFill>
+        </p:spPr>
+        <p:style>
+          <a:lnRef idx="2">
+            <a:schemeClr val="accent1">
+              <a:lumMod val="75000"/>
+            </a:schemeClr>
+          </a:lnRef>
+          <a:fillRef idx="1">
+            <a:schemeClr val="accent1"/>
+          </a:fillRef>
+          <a:effectRef idx="0">
+            <a:srgbClr val="FFFFFF"/>
+          </a:effectRef>
+          <a:fontRef idx="minor">
+            <a:schemeClr val="lt1"/>
+          </a:fontRef>
+        </p:style>
+        <p:txBody>
+          <a:bodyPr rtlCol="0" anchor="ctr"/>
+          <a:p>
+            <a:pPr algn="ctr"/>
+            <a:endParaRPr lang="zh-CN" altLang="en-US"/>
+          </a:p>
+        </p:txBody>
+      </p:sp>
     </p:spTree>
     <p:custDataLst>
       <p:tags r:id="rId1"/>
@@ -6147,7 +7814,7 @@
 </p:sld>
 </file>
 
-<file path=ppt/slides/slide4.xml><?xml version="1.0" encoding="utf-8"?>
+<file path=ppt/slides/slide5.xml><?xml version="1.0" encoding="utf-8"?>
 <p:sld xmlns:a="http://schemas.openxmlformats.org/drawingml/2006/main" xmlns:r="http://schemas.openxmlformats.org/officeDocument/2006/relationships" xmlns:p="http://schemas.openxmlformats.org/presentationml/2006/main">
   <p:cSld>
     <p:spTree>
@@ -6180,23 +7847,26 @@
         </p:blipFill>
         <p:spPr>
           <a:xfrm>
-            <a:off x="1255395" y="93345"/>
-            <a:ext cx="9681210" cy="5435600"/>
+            <a:off x="3293745" y="506095"/>
+            <a:ext cx="8668385" cy="4867275"/>
           </a:xfrm>
           <a:prstGeom prst="rect">
             <a:avLst/>
           </a:prstGeom>
+          <a:solidFill>
+            <a:schemeClr val="accent2"/>
+          </a:solidFill>
         </p:spPr>
       </p:pic>
       <p:sp>
         <p:nvSpPr>
-          <p:cNvPr id="4" name="圆角矩形 3"/>
+          <p:cNvPr id="29" name="圆角矩形 28"/>
           <p:cNvSpPr/>
           <p:nvPr/>
         </p:nvSpPr>
         <p:spPr>
           <a:xfrm>
-            <a:off x="3398520" y="5373370"/>
+            <a:off x="1886585" y="5373370"/>
             <a:ext cx="2356485" cy="921385"/>
           </a:xfrm>
           <a:prstGeom prst="roundRect">
@@ -6223,22 +7893,30 @@
           </a:fontRef>
         </p:style>
         <p:txBody>
-          <a:bodyPr rtlCol="0" anchor="ctr"/>
-          <a:p>
-            <a:pPr algn="ctr"/>
-            <a:endParaRPr lang="zh-CN" altLang="en-US"/>
-          </a:p>
-        </p:txBody>
-      </p:sp>
-      <p:sp>
-        <p:nvSpPr>
-          <p:cNvPr id="5" name="圆角矩形 4"/>
+          <a:bodyPr vertOverflow="overflow" horzOverflow="overflow" vert="horz" wrap="square" numCol="1" spcCol="0" rtlCol="0" fromWordArt="0" anchor="ctr" anchorCtr="0" forceAA="0" compatLnSpc="1">
+            <a:noAutofit/>
+          </a:bodyPr>
+          <a:p>
+            <a:pPr lvl="0" algn="ctr">
+              <a:buClrTx/>
+              <a:buSzTx/>
+              <a:buFontTx/>
+            </a:pPr>
+            <a:endParaRPr lang="zh-CN" altLang="en-US">
+              <a:sym typeface="+mn-ea"/>
+            </a:endParaRPr>
+          </a:p>
+        </p:txBody>
+      </p:sp>
+      <p:sp>
+        <p:nvSpPr>
+          <p:cNvPr id="30" name="圆角矩形 29"/>
           <p:cNvSpPr/>
           <p:nvPr/>
         </p:nvSpPr>
         <p:spPr>
           <a:xfrm>
-            <a:off x="6429375" y="5373370"/>
+            <a:off x="4917440" y="5373370"/>
             <a:ext cx="2356485" cy="921385"/>
           </a:xfrm>
           <a:prstGeom prst="roundRect">
@@ -6265,6 +7943,56 @@
           </a:fontRef>
         </p:style>
         <p:txBody>
+          <a:bodyPr vertOverflow="overflow" horzOverflow="overflow" vert="horz" wrap="square" numCol="1" spcCol="0" rtlCol="0" fromWordArt="0" anchor="ctr" anchorCtr="0" forceAA="0" compatLnSpc="1">
+            <a:noAutofit/>
+          </a:bodyPr>
+          <a:p>
+            <a:pPr lvl="0" algn="ctr">
+              <a:buClrTx/>
+              <a:buSzTx/>
+              <a:buFontTx/>
+            </a:pPr>
+            <a:endParaRPr lang="zh-CN" altLang="en-US">
+              <a:sym typeface="+mn-ea"/>
+            </a:endParaRPr>
+          </a:p>
+        </p:txBody>
+      </p:sp>
+      <p:sp>
+        <p:nvSpPr>
+          <p:cNvPr id="31" name="圆角矩形 30"/>
+          <p:cNvSpPr/>
+          <p:nvPr/>
+        </p:nvSpPr>
+        <p:spPr>
+          <a:xfrm>
+            <a:off x="7948295" y="5373370"/>
+            <a:ext cx="2356485" cy="921385"/>
+          </a:xfrm>
+          <a:prstGeom prst="roundRect">
+            <a:avLst/>
+          </a:prstGeom>
+          <a:solidFill>
+            <a:schemeClr val="bg2"/>
+          </a:solidFill>
+        </p:spPr>
+        <p:style>
+          <a:lnRef idx="2">
+            <a:schemeClr val="accent1">
+              <a:lumMod val="75000"/>
+            </a:schemeClr>
+          </a:lnRef>
+          <a:fillRef idx="1">
+            <a:schemeClr val="accent1"/>
+          </a:fillRef>
+          <a:effectRef idx="0">
+            <a:srgbClr val="FFFFFF"/>
+          </a:effectRef>
+          <a:fontRef idx="minor">
+            <a:schemeClr val="lt1"/>
+          </a:fontRef>
+        </p:style>
+        <p:txBody>
           <a:bodyPr rtlCol="0" anchor="ctr"/>
           <a:p>
             <a:pPr algn="ctr"/>
@@ -6272,9 +8000,850 @@
           </a:p>
         </p:txBody>
       </p:sp>
+      <p:grpSp>
+        <p:nvGrpSpPr>
+          <p:cNvPr id="57" name="组合 56"/>
+          <p:cNvGrpSpPr/>
+          <p:nvPr/>
+        </p:nvGrpSpPr>
+        <p:grpSpPr>
+          <a:xfrm>
+            <a:off x="295910" y="640080"/>
+            <a:ext cx="3261995" cy="1999615"/>
+            <a:chOff x="3937" y="1089"/>
+            <a:chExt cx="10068" cy="6551"/>
+          </a:xfrm>
+        </p:grpSpPr>
+        <p:sp>
+          <p:nvSpPr>
+            <p:cNvPr id="33" name="矩形 32"/>
+            <p:cNvSpPr/>
+            <p:nvPr/>
+          </p:nvSpPr>
+          <p:spPr>
+            <a:xfrm>
+              <a:off x="3937" y="1089"/>
+              <a:ext cx="3358" cy="1636"/>
+            </a:xfrm>
+            <a:prstGeom prst="rect">
+              <a:avLst/>
+            </a:prstGeom>
+            <a:solidFill>
+              <a:srgbClr val="295210"/>
+            </a:solidFill>
+            <a:ln w="12700" cmpd="sng">
+              <a:solidFill>
+                <a:srgbClr val="04120C"/>
+              </a:solidFill>
+              <a:prstDash val="solid"/>
+            </a:ln>
+          </p:spPr>
+          <p:style>
+            <a:lnRef idx="2">
+              <a:schemeClr val="accent1">
+                <a:lumMod val="75000"/>
+              </a:schemeClr>
+            </a:lnRef>
+            <a:fillRef idx="1">
+              <a:schemeClr val="accent1"/>
+            </a:fillRef>
+            <a:effectRef idx="0">
+              <a:srgbClr val="FFFFFF"/>
+            </a:effectRef>
+            <a:fontRef idx="minor">
+              <a:schemeClr val="lt1"/>
+            </a:fontRef>
+          </p:style>
+          <p:txBody>
+            <a:bodyPr rtlCol="0" anchor="ctr"/>
+            <a:p>
+              <a:pPr algn="ctr"/>
+              <a:endParaRPr lang="zh-CN" altLang="en-US"/>
+            </a:p>
+          </p:txBody>
+        </p:sp>
+        <p:sp>
+          <p:nvSpPr>
+            <p:cNvPr id="34" name="矩形 33"/>
+            <p:cNvSpPr/>
+            <p:nvPr/>
+          </p:nvSpPr>
+          <p:spPr>
+            <a:xfrm>
+              <a:off x="7291" y="1089"/>
+              <a:ext cx="3358" cy="1636"/>
+            </a:xfrm>
+            <a:prstGeom prst="rect">
+              <a:avLst/>
+            </a:prstGeom>
+            <a:solidFill>
+              <a:srgbClr val="2A7139"/>
+            </a:solidFill>
+            <a:ln w="12700" cmpd="sng">
+              <a:solidFill>
+                <a:srgbClr val="04120C"/>
+              </a:solidFill>
+              <a:prstDash val="solid"/>
+            </a:ln>
+          </p:spPr>
+          <p:style>
+            <a:lnRef idx="2">
+              <a:schemeClr val="accent1">
+                <a:lumMod val="75000"/>
+              </a:schemeClr>
+            </a:lnRef>
+            <a:fillRef idx="1">
+              <a:schemeClr val="accent1"/>
+            </a:fillRef>
+            <a:effectRef idx="0">
+              <a:srgbClr val="FFFFFF"/>
+            </a:effectRef>
+            <a:fontRef idx="minor">
+              <a:schemeClr val="lt1"/>
+            </a:fontRef>
+          </p:style>
+          <p:txBody>
+            <a:bodyPr rtlCol="0" anchor="ctr"/>
+            <a:p>
+              <a:pPr algn="ctr"/>
+              <a:endParaRPr lang="zh-CN" altLang="en-US"/>
+            </a:p>
+          </p:txBody>
+        </p:sp>
+        <p:sp>
+          <p:nvSpPr>
+            <p:cNvPr id="35" name="矩形 34"/>
+            <p:cNvSpPr/>
+            <p:nvPr/>
+          </p:nvSpPr>
+          <p:spPr>
+            <a:xfrm>
+              <a:off x="10647" y="1091"/>
+              <a:ext cx="3358" cy="1636"/>
+            </a:xfrm>
+            <a:prstGeom prst="rect">
+              <a:avLst/>
+            </a:prstGeom>
+            <a:solidFill>
+              <a:srgbClr val="295210"/>
+            </a:solidFill>
+            <a:ln w="12700" cmpd="sng">
+              <a:solidFill>
+                <a:srgbClr val="04120C"/>
+              </a:solidFill>
+              <a:prstDash val="solid"/>
+            </a:ln>
+          </p:spPr>
+          <p:style>
+            <a:lnRef idx="2">
+              <a:schemeClr val="accent1">
+                <a:lumMod val="75000"/>
+              </a:schemeClr>
+            </a:lnRef>
+            <a:fillRef idx="1">
+              <a:schemeClr val="accent1"/>
+            </a:fillRef>
+            <a:effectRef idx="0">
+              <a:srgbClr val="FFFFFF"/>
+            </a:effectRef>
+            <a:fontRef idx="minor">
+              <a:schemeClr val="lt1"/>
+            </a:fontRef>
+          </p:style>
+          <p:txBody>
+            <a:bodyPr vertOverflow="overflow" horzOverflow="overflow" vert="horz" wrap="square" numCol="1" spcCol="0" rtlCol="0" fromWordArt="0" anchor="ctr" anchorCtr="0" forceAA="0" compatLnSpc="1">
+              <a:noAutofit/>
+            </a:bodyPr>
+            <a:p>
+              <a:pPr lvl="0" algn="ctr">
+                <a:buClrTx/>
+                <a:buSzTx/>
+                <a:buFontTx/>
+              </a:pPr>
+              <a:endParaRPr lang="zh-CN" altLang="en-US">
+                <a:sym typeface="+mn-ea"/>
+              </a:endParaRPr>
+            </a:p>
+          </p:txBody>
+        </p:sp>
+        <p:sp>
+          <p:nvSpPr>
+            <p:cNvPr id="36" name="矩形 35"/>
+            <p:cNvSpPr/>
+            <p:nvPr/>
+          </p:nvSpPr>
+          <p:spPr>
+            <a:xfrm>
+              <a:off x="3937" y="2727"/>
+              <a:ext cx="3358" cy="1636"/>
+            </a:xfrm>
+            <a:prstGeom prst="rect">
+              <a:avLst/>
+            </a:prstGeom>
+            <a:solidFill>
+              <a:srgbClr val="2A7139"/>
+            </a:solidFill>
+            <a:ln w="12700" cmpd="sng">
+              <a:solidFill>
+                <a:srgbClr val="04120C"/>
+              </a:solidFill>
+              <a:prstDash val="solid"/>
+            </a:ln>
+          </p:spPr>
+          <p:style>
+            <a:lnRef idx="2">
+              <a:schemeClr val="accent1">
+                <a:lumMod val="75000"/>
+              </a:schemeClr>
+            </a:lnRef>
+            <a:fillRef idx="1">
+              <a:schemeClr val="accent1"/>
+            </a:fillRef>
+            <a:effectRef idx="0">
+              <a:srgbClr val="FFFFFF"/>
+            </a:effectRef>
+            <a:fontRef idx="minor">
+              <a:schemeClr val="lt1"/>
+            </a:fontRef>
+          </p:style>
+          <p:txBody>
+            <a:bodyPr vertOverflow="overflow" horzOverflow="overflow" vert="horz" wrap="square" numCol="1" spcCol="0" rtlCol="0" fromWordArt="0" anchor="ctr" anchorCtr="0" forceAA="0" compatLnSpc="1">
+              <a:noAutofit/>
+            </a:bodyPr>
+            <a:p>
+              <a:pPr lvl="0" algn="ctr">
+                <a:buClrTx/>
+                <a:buSzTx/>
+                <a:buFontTx/>
+              </a:pPr>
+              <a:endParaRPr lang="zh-CN" altLang="en-US">
+                <a:sym typeface="+mn-ea"/>
+              </a:endParaRPr>
+            </a:p>
+          </p:txBody>
+        </p:sp>
+        <p:sp>
+          <p:nvSpPr>
+            <p:cNvPr id="37" name="矩形 36"/>
+            <p:cNvSpPr/>
+            <p:nvPr/>
+          </p:nvSpPr>
+          <p:spPr>
+            <a:xfrm>
+              <a:off x="7291" y="2727"/>
+              <a:ext cx="3358" cy="1636"/>
+            </a:xfrm>
+            <a:prstGeom prst="rect">
+              <a:avLst/>
+            </a:prstGeom>
+            <a:solidFill>
+              <a:srgbClr val="98A651"/>
+            </a:solidFill>
+            <a:ln w="12700" cmpd="sng">
+              <a:solidFill>
+                <a:srgbClr val="04120C"/>
+              </a:solidFill>
+              <a:prstDash val="solid"/>
+            </a:ln>
+          </p:spPr>
+          <p:style>
+            <a:lnRef idx="2">
+              <a:schemeClr val="accent1">
+                <a:lumMod val="75000"/>
+              </a:schemeClr>
+            </a:lnRef>
+            <a:fillRef idx="1">
+              <a:schemeClr val="accent1"/>
+            </a:fillRef>
+            <a:effectRef idx="0">
+              <a:srgbClr val="FFFFFF"/>
+            </a:effectRef>
+            <a:fontRef idx="minor">
+              <a:schemeClr val="lt1"/>
+            </a:fontRef>
+          </p:style>
+          <p:txBody>
+            <a:bodyPr rtlCol="0" anchor="ctr"/>
+            <a:p>
+              <a:pPr algn="ctr"/>
+              <a:endParaRPr lang="zh-CN" altLang="en-US"/>
+            </a:p>
+          </p:txBody>
+        </p:sp>
+        <p:sp>
+          <p:nvSpPr>
+            <p:cNvPr id="38" name="矩形 37"/>
+            <p:cNvSpPr/>
+            <p:nvPr/>
+          </p:nvSpPr>
+          <p:spPr>
+            <a:xfrm>
+              <a:off x="10647" y="2727"/>
+              <a:ext cx="3358" cy="1636"/>
+            </a:xfrm>
+            <a:prstGeom prst="rect">
+              <a:avLst/>
+            </a:prstGeom>
+            <a:solidFill>
+              <a:srgbClr val="2A7139"/>
+            </a:solidFill>
+            <a:ln w="12700" cmpd="sng">
+              <a:solidFill>
+                <a:srgbClr val="04120C"/>
+              </a:solidFill>
+              <a:prstDash val="solid"/>
+            </a:ln>
+          </p:spPr>
+          <p:style>
+            <a:lnRef idx="2">
+              <a:schemeClr val="accent1">
+                <a:lumMod val="75000"/>
+              </a:schemeClr>
+            </a:lnRef>
+            <a:fillRef idx="1">
+              <a:schemeClr val="accent1"/>
+            </a:fillRef>
+            <a:effectRef idx="0">
+              <a:srgbClr val="FFFFFF"/>
+            </a:effectRef>
+            <a:fontRef idx="minor">
+              <a:schemeClr val="lt1"/>
+            </a:fontRef>
+          </p:style>
+          <p:txBody>
+            <a:bodyPr vertOverflow="overflow" horzOverflow="overflow" vert="horz" wrap="square" numCol="1" spcCol="0" rtlCol="0" fromWordArt="0" anchor="ctr" anchorCtr="0" forceAA="0" compatLnSpc="1">
+              <a:noAutofit/>
+            </a:bodyPr>
+            <a:p>
+              <a:pPr lvl="0" algn="ctr">
+                <a:buClrTx/>
+                <a:buSzTx/>
+                <a:buFontTx/>
+              </a:pPr>
+              <a:endParaRPr lang="zh-CN" altLang="en-US">
+                <a:sym typeface="+mn-ea"/>
+              </a:endParaRPr>
+            </a:p>
+          </p:txBody>
+        </p:sp>
+        <p:sp>
+          <p:nvSpPr>
+            <p:cNvPr id="39" name="矩形 38"/>
+            <p:cNvSpPr/>
+            <p:nvPr/>
+          </p:nvSpPr>
+          <p:spPr>
+            <a:xfrm>
+              <a:off x="3937" y="4365"/>
+              <a:ext cx="3358" cy="1636"/>
+            </a:xfrm>
+            <a:prstGeom prst="rect">
+              <a:avLst/>
+            </a:prstGeom>
+            <a:solidFill>
+              <a:srgbClr val="295210"/>
+            </a:solidFill>
+            <a:ln w="12700" cmpd="sng">
+              <a:solidFill>
+                <a:srgbClr val="04120C"/>
+              </a:solidFill>
+              <a:prstDash val="solid"/>
+            </a:ln>
+          </p:spPr>
+          <p:style>
+            <a:lnRef idx="2">
+              <a:schemeClr val="accent1">
+                <a:lumMod val="75000"/>
+              </a:schemeClr>
+            </a:lnRef>
+            <a:fillRef idx="1">
+              <a:schemeClr val="accent1"/>
+            </a:fillRef>
+            <a:effectRef idx="0">
+              <a:srgbClr val="FFFFFF"/>
+            </a:effectRef>
+            <a:fontRef idx="minor">
+              <a:schemeClr val="lt1"/>
+            </a:fontRef>
+          </p:style>
+          <p:txBody>
+            <a:bodyPr vertOverflow="overflow" horzOverflow="overflow" vert="horz" wrap="square" numCol="1" spcCol="0" rtlCol="0" fromWordArt="0" anchor="ctr" anchorCtr="0" forceAA="0" compatLnSpc="1">
+              <a:noAutofit/>
+            </a:bodyPr>
+            <a:p>
+              <a:pPr lvl="0" algn="ctr">
+                <a:buClrTx/>
+                <a:buSzTx/>
+                <a:buFontTx/>
+              </a:pPr>
+              <a:endParaRPr lang="zh-CN" altLang="en-US">
+                <a:sym typeface="+mn-ea"/>
+              </a:endParaRPr>
+            </a:p>
+          </p:txBody>
+        </p:sp>
+        <p:sp>
+          <p:nvSpPr>
+            <p:cNvPr id="40" name="矩形 39"/>
+            <p:cNvSpPr/>
+            <p:nvPr/>
+          </p:nvSpPr>
+          <p:spPr>
+            <a:xfrm>
+              <a:off x="7291" y="4365"/>
+              <a:ext cx="3358" cy="1636"/>
+            </a:xfrm>
+            <a:prstGeom prst="rect">
+              <a:avLst/>
+            </a:prstGeom>
+            <a:solidFill>
+              <a:srgbClr val="2A7139"/>
+            </a:solidFill>
+            <a:ln w="12700" cmpd="sng">
+              <a:solidFill>
+                <a:srgbClr val="04120C"/>
+              </a:solidFill>
+              <a:prstDash val="solid"/>
+            </a:ln>
+          </p:spPr>
+          <p:style>
+            <a:lnRef idx="2">
+              <a:schemeClr val="accent1">
+                <a:lumMod val="75000"/>
+              </a:schemeClr>
+            </a:lnRef>
+            <a:fillRef idx="1">
+              <a:schemeClr val="accent1"/>
+            </a:fillRef>
+            <a:effectRef idx="0">
+              <a:srgbClr val="FFFFFF"/>
+            </a:effectRef>
+            <a:fontRef idx="minor">
+              <a:schemeClr val="lt1"/>
+            </a:fontRef>
+          </p:style>
+          <p:txBody>
+            <a:bodyPr vertOverflow="overflow" horzOverflow="overflow" vert="horz" wrap="square" numCol="1" spcCol="0" rtlCol="0" fromWordArt="0" anchor="ctr" anchorCtr="0" forceAA="0" compatLnSpc="1">
+              <a:noAutofit/>
+            </a:bodyPr>
+            <a:p>
+              <a:pPr lvl="0" algn="ctr">
+                <a:buClrTx/>
+                <a:buSzTx/>
+                <a:buFontTx/>
+              </a:pPr>
+              <a:endParaRPr lang="zh-CN" altLang="en-US">
+                <a:sym typeface="+mn-ea"/>
+              </a:endParaRPr>
+            </a:p>
+          </p:txBody>
+        </p:sp>
+        <p:sp>
+          <p:nvSpPr>
+            <p:cNvPr id="41" name="矩形 40"/>
+            <p:cNvSpPr/>
+            <p:nvPr/>
+          </p:nvSpPr>
+          <p:spPr>
+            <a:xfrm>
+              <a:off x="10647" y="4365"/>
+              <a:ext cx="3358" cy="1636"/>
+            </a:xfrm>
+            <a:prstGeom prst="rect">
+              <a:avLst/>
+            </a:prstGeom>
+            <a:solidFill>
+              <a:srgbClr val="98A651"/>
+            </a:solidFill>
+            <a:ln w="12700" cmpd="sng">
+              <a:solidFill>
+                <a:srgbClr val="04120C"/>
+              </a:solidFill>
+              <a:prstDash val="solid"/>
+            </a:ln>
+          </p:spPr>
+          <p:style>
+            <a:lnRef idx="2">
+              <a:schemeClr val="accent1">
+                <a:lumMod val="75000"/>
+              </a:schemeClr>
+            </a:lnRef>
+            <a:fillRef idx="1">
+              <a:schemeClr val="accent1"/>
+            </a:fillRef>
+            <a:effectRef idx="0">
+              <a:srgbClr val="FFFFFF"/>
+            </a:effectRef>
+            <a:fontRef idx="minor">
+              <a:schemeClr val="lt1"/>
+            </a:fontRef>
+          </p:style>
+          <p:txBody>
+            <a:bodyPr vertOverflow="overflow" horzOverflow="overflow" vert="horz" wrap="square" numCol="1" spcCol="0" rtlCol="0" fromWordArt="0" anchor="ctr" anchorCtr="0" forceAA="0" compatLnSpc="1">
+              <a:noAutofit/>
+            </a:bodyPr>
+            <a:p>
+              <a:pPr lvl="0" algn="ctr">
+                <a:buClrTx/>
+                <a:buSzTx/>
+                <a:buFontTx/>
+              </a:pPr>
+              <a:endParaRPr lang="zh-CN" altLang="en-US">
+                <a:sym typeface="+mn-ea"/>
+              </a:endParaRPr>
+            </a:p>
+          </p:txBody>
+        </p:sp>
+        <p:sp>
+          <p:nvSpPr>
+            <p:cNvPr id="42" name="矩形 41"/>
+            <p:cNvSpPr/>
+            <p:nvPr/>
+          </p:nvSpPr>
+          <p:spPr>
+            <a:xfrm>
+              <a:off x="3937" y="6004"/>
+              <a:ext cx="3358" cy="1636"/>
+            </a:xfrm>
+            <a:prstGeom prst="rect">
+              <a:avLst/>
+            </a:prstGeom>
+            <a:solidFill>
+              <a:srgbClr val="2A7139"/>
+            </a:solidFill>
+            <a:ln w="12700" cmpd="sng">
+              <a:solidFill>
+                <a:srgbClr val="04120C"/>
+              </a:solidFill>
+              <a:prstDash val="solid"/>
+            </a:ln>
+          </p:spPr>
+          <p:style>
+            <a:lnRef idx="2">
+              <a:schemeClr val="accent1">
+                <a:lumMod val="75000"/>
+              </a:schemeClr>
+            </a:lnRef>
+            <a:fillRef idx="1">
+              <a:schemeClr val="accent1"/>
+            </a:fillRef>
+            <a:effectRef idx="0">
+              <a:srgbClr val="FFFFFF"/>
+            </a:effectRef>
+            <a:fontRef idx="minor">
+              <a:schemeClr val="lt1"/>
+            </a:fontRef>
+          </p:style>
+          <p:txBody>
+            <a:bodyPr vertOverflow="overflow" horzOverflow="overflow" vert="horz" wrap="square" numCol="1" spcCol="0" rtlCol="0" fromWordArt="0" anchor="ctr" anchorCtr="0" forceAA="0" compatLnSpc="1">
+              <a:noAutofit/>
+            </a:bodyPr>
+            <a:p>
+              <a:pPr lvl="0" algn="ctr">
+                <a:buClrTx/>
+                <a:buSzTx/>
+                <a:buFontTx/>
+              </a:pPr>
+              <a:endParaRPr lang="zh-CN" altLang="en-US">
+                <a:sym typeface="+mn-ea"/>
+              </a:endParaRPr>
+            </a:p>
+          </p:txBody>
+        </p:sp>
+        <p:sp>
+          <p:nvSpPr>
+            <p:cNvPr id="43" name="矩形 42"/>
+            <p:cNvSpPr/>
+            <p:nvPr/>
+          </p:nvSpPr>
+          <p:spPr>
+            <a:xfrm>
+              <a:off x="7291" y="6004"/>
+              <a:ext cx="3358" cy="1636"/>
+            </a:xfrm>
+            <a:prstGeom prst="rect">
+              <a:avLst/>
+            </a:prstGeom>
+            <a:solidFill>
+              <a:srgbClr val="295210"/>
+            </a:solidFill>
+            <a:ln w="12700" cmpd="sng">
+              <a:solidFill>
+                <a:srgbClr val="04120C"/>
+              </a:solidFill>
+              <a:prstDash val="solid"/>
+            </a:ln>
+          </p:spPr>
+          <p:style>
+            <a:lnRef idx="2">
+              <a:schemeClr val="accent1">
+                <a:lumMod val="75000"/>
+              </a:schemeClr>
+            </a:lnRef>
+            <a:fillRef idx="1">
+              <a:schemeClr val="accent1"/>
+            </a:fillRef>
+            <a:effectRef idx="0">
+              <a:srgbClr val="FFFFFF"/>
+            </a:effectRef>
+            <a:fontRef idx="minor">
+              <a:schemeClr val="lt1"/>
+            </a:fontRef>
+          </p:style>
+          <p:txBody>
+            <a:bodyPr vertOverflow="overflow" horzOverflow="overflow" vert="horz" wrap="square" numCol="1" spcCol="0" rtlCol="0" fromWordArt="0" anchor="ctr" anchorCtr="0" forceAA="0" compatLnSpc="1">
+              <a:noAutofit/>
+            </a:bodyPr>
+            <a:p>
+              <a:pPr lvl="0" algn="ctr">
+                <a:buClrTx/>
+                <a:buSzTx/>
+                <a:buFontTx/>
+              </a:pPr>
+              <a:endParaRPr lang="zh-CN" altLang="en-US">
+                <a:sym typeface="+mn-ea"/>
+              </a:endParaRPr>
+            </a:p>
+          </p:txBody>
+        </p:sp>
+        <p:sp>
+          <p:nvSpPr>
+            <p:cNvPr id="44" name="矩形 43"/>
+            <p:cNvSpPr/>
+            <p:nvPr/>
+          </p:nvSpPr>
+          <p:spPr>
+            <a:xfrm>
+              <a:off x="10647" y="6004"/>
+              <a:ext cx="3358" cy="1636"/>
+            </a:xfrm>
+            <a:prstGeom prst="rect">
+              <a:avLst/>
+            </a:prstGeom>
+            <a:solidFill>
+              <a:srgbClr val="2A7139"/>
+            </a:solidFill>
+            <a:ln w="12700" cmpd="sng">
+              <a:solidFill>
+                <a:srgbClr val="04120C"/>
+              </a:solidFill>
+              <a:prstDash val="solid"/>
+            </a:ln>
+          </p:spPr>
+          <p:style>
+            <a:lnRef idx="2">
+              <a:schemeClr val="accent1">
+                <a:lumMod val="75000"/>
+              </a:schemeClr>
+            </a:lnRef>
+            <a:fillRef idx="1">
+              <a:schemeClr val="accent1"/>
+            </a:fillRef>
+            <a:effectRef idx="0">
+              <a:srgbClr val="FFFFFF"/>
+            </a:effectRef>
+            <a:fontRef idx="minor">
+              <a:schemeClr val="lt1"/>
+            </a:fontRef>
+          </p:style>
+          <p:txBody>
+            <a:bodyPr vertOverflow="overflow" horzOverflow="overflow" vert="horz" wrap="square" numCol="1" spcCol="0" rtlCol="0" fromWordArt="0" anchor="ctr" anchorCtr="0" forceAA="0" compatLnSpc="1">
+              <a:noAutofit/>
+            </a:bodyPr>
+            <a:p>
+              <a:pPr lvl="0" algn="ctr">
+                <a:buClrTx/>
+                <a:buSzTx/>
+                <a:buFontTx/>
+              </a:pPr>
+              <a:endParaRPr lang="zh-CN" altLang="en-US">
+                <a:sym typeface="+mn-ea"/>
+              </a:endParaRPr>
+            </a:p>
+          </p:txBody>
+        </p:sp>
+      </p:grpSp>
     </p:spTree>
     <p:custDataLst>
       <p:tags r:id="rId2"/>
+    </p:custDataLst>
+  </p:cSld>
+  <p:clrMapOvr>
+    <a:masterClrMapping/>
+  </p:clrMapOvr>
+</p:sld>
+</file>
+
+<file path=ppt/slides/slide6.xml><?xml version="1.0" encoding="utf-8"?>
+<p:sld xmlns:a="http://schemas.openxmlformats.org/drawingml/2006/main" xmlns:r="http://schemas.openxmlformats.org/officeDocument/2006/relationships" xmlns:p="http://schemas.openxmlformats.org/presentationml/2006/main">
+  <p:cSld>
+    <p:spTree>
+      <p:nvGrpSpPr>
+        <p:cNvPr id="1" name=""/>
+        <p:cNvGrpSpPr/>
+        <p:nvPr/>
+      </p:nvGrpSpPr>
+      <p:grpSpPr>
+        <a:xfrm>
+          <a:off x="0" y="0"/>
+          <a:ext cx="0" cy="0"/>
+          <a:chOff x="0" y="0"/>
+          <a:chExt cx="0" cy="0"/>
+        </a:xfrm>
+      </p:grpSpPr>
+      <p:sp>
+        <p:nvSpPr>
+          <p:cNvPr id="29" name="圆角矩形 28"/>
+          <p:cNvSpPr/>
+          <p:nvPr/>
+        </p:nvSpPr>
+        <p:spPr>
+          <a:xfrm>
+            <a:off x="1886585" y="5373370"/>
+            <a:ext cx="2356485" cy="921385"/>
+          </a:xfrm>
+          <a:prstGeom prst="roundRect">
+            <a:avLst/>
+          </a:prstGeom>
+          <a:solidFill>
+            <a:schemeClr val="bg2"/>
+          </a:solidFill>
+        </p:spPr>
+        <p:style>
+          <a:lnRef idx="2">
+            <a:schemeClr val="accent1">
+              <a:lumMod val="75000"/>
+            </a:schemeClr>
+          </a:lnRef>
+          <a:fillRef idx="1">
+            <a:schemeClr val="accent1"/>
+          </a:fillRef>
+          <a:effectRef idx="0">
+            <a:srgbClr val="FFFFFF"/>
+          </a:effectRef>
+          <a:fontRef idx="minor">
+            <a:schemeClr val="lt1"/>
+          </a:fontRef>
+        </p:style>
+        <p:txBody>
+          <a:bodyPr vertOverflow="overflow" horzOverflow="overflow" vert="horz" wrap="square" numCol="1" spcCol="0" rtlCol="0" fromWordArt="0" anchor="ctr" anchorCtr="0" forceAA="0" compatLnSpc="1">
+            <a:noAutofit/>
+          </a:bodyPr>
+          <a:p>
+            <a:pPr lvl="0" algn="ctr">
+              <a:buClrTx/>
+              <a:buSzTx/>
+              <a:buFontTx/>
+            </a:pPr>
+            <a:endParaRPr lang="zh-CN" altLang="en-US">
+              <a:sym typeface="+mn-ea"/>
+            </a:endParaRPr>
+          </a:p>
+        </p:txBody>
+      </p:sp>
+      <p:sp>
+        <p:nvSpPr>
+          <p:cNvPr id="30" name="圆角矩形 29"/>
+          <p:cNvSpPr/>
+          <p:nvPr/>
+        </p:nvSpPr>
+        <p:spPr>
+          <a:xfrm>
+            <a:off x="4917440" y="5373370"/>
+            <a:ext cx="2356485" cy="921385"/>
+          </a:xfrm>
+          <a:prstGeom prst="roundRect">
+            <a:avLst/>
+          </a:prstGeom>
+          <a:solidFill>
+            <a:schemeClr val="bg2"/>
+          </a:solidFill>
+        </p:spPr>
+        <p:style>
+          <a:lnRef idx="2">
+            <a:schemeClr val="accent1">
+              <a:lumMod val="75000"/>
+            </a:schemeClr>
+          </a:lnRef>
+          <a:fillRef idx="1">
+            <a:schemeClr val="accent1"/>
+          </a:fillRef>
+          <a:effectRef idx="0">
+            <a:srgbClr val="FFFFFF"/>
+          </a:effectRef>
+          <a:fontRef idx="minor">
+            <a:schemeClr val="lt1"/>
+          </a:fontRef>
+        </p:style>
+        <p:txBody>
+          <a:bodyPr vertOverflow="overflow" horzOverflow="overflow" vert="horz" wrap="square" numCol="1" spcCol="0" rtlCol="0" fromWordArt="0" anchor="ctr" anchorCtr="0" forceAA="0" compatLnSpc="1">
+            <a:noAutofit/>
+          </a:bodyPr>
+          <a:p>
+            <a:pPr lvl="0" algn="ctr">
+              <a:buClrTx/>
+              <a:buSzTx/>
+              <a:buFontTx/>
+            </a:pPr>
+            <a:endParaRPr lang="zh-CN" altLang="en-US">
+              <a:sym typeface="+mn-ea"/>
+            </a:endParaRPr>
+          </a:p>
+        </p:txBody>
+      </p:sp>
+      <p:sp>
+        <p:nvSpPr>
+          <p:cNvPr id="31" name="圆角矩形 30"/>
+          <p:cNvSpPr/>
+          <p:nvPr/>
+        </p:nvSpPr>
+        <p:spPr>
+          <a:xfrm>
+            <a:off x="7948295" y="5373370"/>
+            <a:ext cx="2356485" cy="921385"/>
+          </a:xfrm>
+          <a:prstGeom prst="roundRect">
+            <a:avLst/>
+          </a:prstGeom>
+          <a:solidFill>
+            <a:schemeClr val="accent2"/>
+          </a:solidFill>
+        </p:spPr>
+        <p:style>
+          <a:lnRef idx="2">
+            <a:schemeClr val="accent1">
+              <a:lumMod val="75000"/>
+            </a:schemeClr>
+          </a:lnRef>
+          <a:fillRef idx="1">
+            <a:schemeClr val="accent1"/>
+          </a:fillRef>
+          <a:effectRef idx="0">
+            <a:srgbClr val="FFFFFF"/>
+          </a:effectRef>
+          <a:fontRef idx="minor">
+            <a:schemeClr val="lt1"/>
+          </a:fontRef>
+        </p:style>
+        <p:txBody>
+          <a:bodyPr vertOverflow="overflow" horzOverflow="overflow" vert="horz" wrap="square" numCol="1" spcCol="0" rtlCol="0" fromWordArt="0" anchor="ctr" anchorCtr="0" forceAA="0" compatLnSpc="1">
+            <a:noAutofit/>
+          </a:bodyPr>
+          <a:p>
+            <a:pPr lvl="0" algn="ctr">
+              <a:buClrTx/>
+              <a:buSzTx/>
+              <a:buFontTx/>
+            </a:pPr>
+            <a:endParaRPr lang="zh-CN" altLang="en-US">
+              <a:sym typeface="+mn-ea"/>
+            </a:endParaRPr>
+          </a:p>
+        </p:txBody>
+      </p:sp>
+    </p:spTree>
+    <p:custDataLst>
+      <p:tags r:id="rId1"/>
     </p:custDataLst>
   </p:cSld>
   <p:clrMapOvr>
@@ -7139,6 +9708,48 @@
 </p:tagLst>
 </file>
 
+<file path=ppt/tags/tag67.xml><?xml version="1.0" encoding="utf-8"?>
+<p:tagLst xmlns:p="http://schemas.openxmlformats.org/presentationml/2006/main">
+  <p:tag name="KSO_WM_SLIDE_ID" val="custom20205081_1"/>
+  <p:tag name="KSO_WM_TEMPLATE_SUBCATEGORY" val="19"/>
+  <p:tag name="KSO_WM_TEMPLATE_MASTER_TYPE" val="0"/>
+  <p:tag name="KSO_WM_TEMPLATE_COLOR_TYPE" val="1"/>
+  <p:tag name="KSO_WM_SLIDE_TYPE" val="title"/>
+  <p:tag name="KSO_WM_SLIDE_SUBTYPE" val="defaultBlank"/>
+  <p:tag name="KSO_WM_SLIDE_ITEM_CNT" val="0"/>
+  <p:tag name="KSO_WM_SLIDE_INDEX" val="1"/>
+  <p:tag name="KSO_WM_TAG_VERSION" val="1.0"/>
+  <p:tag name="KSO_WM_BEAUTIFY_FLAG" val="#wm#"/>
+  <p:tag name="KSO_WM_TEMPLATE_CATEGORY" val="custom"/>
+  <p:tag name="KSO_WM_TEMPLATE_INDEX" val="20205081"/>
+  <p:tag name="KSO_WM_SLIDE_LAYOUT" val="a_b"/>
+  <p:tag name="KSO_WM_SLIDE_LAYOUT_CNT" val="1_1"/>
+  <p:tag name="KSO_WM_UNIT_SHOW_EDIT_AREA_INDICATION" val="1"/>
+  <p:tag name="KSO_WM_TEMPLATE_THUMBS_INDEX" val="1、4、7、12、13、14、15、16、17、18、20、24、25、28、33、36、40、43、44"/>
+</p:tagLst>
+</file>
+
+<file path=ppt/tags/tag68.xml><?xml version="1.0" encoding="utf-8"?>
+<p:tagLst xmlns:p="http://schemas.openxmlformats.org/presentationml/2006/main">
+  <p:tag name="KSO_WM_SLIDE_ID" val="custom20205081_1"/>
+  <p:tag name="KSO_WM_TEMPLATE_SUBCATEGORY" val="19"/>
+  <p:tag name="KSO_WM_TEMPLATE_MASTER_TYPE" val="0"/>
+  <p:tag name="KSO_WM_TEMPLATE_COLOR_TYPE" val="1"/>
+  <p:tag name="KSO_WM_SLIDE_TYPE" val="title"/>
+  <p:tag name="KSO_WM_SLIDE_SUBTYPE" val="defaultBlank"/>
+  <p:tag name="KSO_WM_SLIDE_ITEM_CNT" val="0"/>
+  <p:tag name="KSO_WM_SLIDE_INDEX" val="1"/>
+  <p:tag name="KSO_WM_TAG_VERSION" val="1.0"/>
+  <p:tag name="KSO_WM_BEAUTIFY_FLAG" val="#wm#"/>
+  <p:tag name="KSO_WM_TEMPLATE_CATEGORY" val="custom"/>
+  <p:tag name="KSO_WM_TEMPLATE_INDEX" val="20205081"/>
+  <p:tag name="KSO_WM_SLIDE_LAYOUT" val="a_b"/>
+  <p:tag name="KSO_WM_SLIDE_LAYOUT_CNT" val="1_1"/>
+  <p:tag name="KSO_WM_UNIT_SHOW_EDIT_AREA_INDICATION" val="1"/>
+  <p:tag name="KSO_WM_TEMPLATE_THUMBS_INDEX" val="1、4、7、12、13、14、15、16、17、18、20、24、25、28、33、36、40、43、44"/>
+</p:tagLst>
+</file>
+
 <file path=ppt/tags/tag7.xml><?xml version="1.0" encoding="utf-8"?>
 <p:tagLst xmlns:p="http://schemas.openxmlformats.org/presentationml/2006/main">
   <p:tag name="KSO_WM_UNIT_HIGHLIGHT" val="0"/>
